--- a/Topic_A/Exam_Practice/AT-A-L11_Speaking_Workshop_Reading_Travel_and_Tourism_Texts.pptx
+++ b/Topic_A/Exam_Practice/AT-A-L11_Speaking_Workshop_Reading_Travel_and_Tourism_Texts.pptx
@@ -523,7 +523,11 @@
           <a:lstStyle/>
           <a:p>
             <a:r>
-              <a:rPr lang="en-US" dirty="0"/>
+              <a:rPr lang="ar-SA" dirty="0">
+                <a:latin typeface="Amiri" pitchFamily="2" charset="-78"/>
+                <a:ea typeface="Amiri" pitchFamily="2" charset="-78"/>
+                <a:cs typeface="Amiri" pitchFamily="2" charset="-78"/>
+              </a:rPr>
               <a:t>WORKSHOP AT A GLANCE — 60 minutes on Teams, mostly in breakout rooms of three.
 0–2 Welcome · 2–6 How Paper 3 works · 6–10 Language bank · 10–13 Breakout routine · 13–33 Role plays A–D in rooms (rotate roles) · 33–37 Role-play models (main room) · 37–50 Topic conversation in rooms · 50–55 Conversation models · 55–58 Feedback + self-check · 58–60 Close.
 Content: teacher-made exam scenarios for Advanced Topic A, Lesson 11 (Travel and Tourism, AT-A-L11), using that lesson’s language (holidays in the past tense; hotels and sights; إِذَا (real) and لَوْ (unreal) conditionals). Every task has Core · Develop · Stretch support and a model answer.
@@ -615,7 +619,11 @@
           <a:lstStyle/>
           <a:p>
             <a:r>
-              <a:rPr lang="en-US" dirty="0"/>
+              <a:rPr lang="ar-SA" dirty="0">
+                <a:latin typeface="Amiri" pitchFamily="2" charset="-78"/>
+                <a:ea typeface="Amiri" pitchFamily="2" charset="-78"/>
+                <a:cs typeface="Amiri" pitchFamily="2" charset="-78"/>
+              </a:rPr>
               <a:t>ROLE PLAY C (Develop) — back at school.
 SET-UP IN THE BREAKOUT ROOM: A = examiner (reads the left column ONLY — the questions, in order), B = candidate (sees the task column; Core may use the help column), C = observer (ticks the feedback checklist). 1 minute preparation, about 3 minutes speaking, 1 minute feedback, then rotate.
 Task ! is the unexpected question: in the exam the candidate has not seen it — the examiner should read it without warning.
@@ -707,7 +715,11 @@
           <a:lstStyle/>
           <a:p>
             <a:r>
-              <a:rPr lang="en-US" dirty="0"/>
+              <a:rPr lang="ar-SA" dirty="0">
+                <a:latin typeface="Amiri" pitchFamily="2" charset="-78"/>
+                <a:ea typeface="Amiri" pitchFamily="2" charset="-78"/>
+                <a:cs typeface="Amiri" pitchFamily="2" charset="-78"/>
+              </a:rPr>
               <a:t>ROLE PLAY D (Stretch) — a travel podcast.
 SET-UP IN THE BREAKOUT ROOM: A = examiner (reads the left column ONLY — the questions, in order), B = candidate (sees the task column; Core may use the help column), C = observer (ticks the feedback checklist). 1 minute preparation, about 3 minutes speaking, 1 minute feedback, then rotate.
 Task ! is the unexpected question: in the exam the candidate has not seen it — the examiner should read it without warning.
@@ -1243,7 +1255,11 @@
           <a:lstStyle/>
           <a:p>
             <a:r>
-              <a:rPr lang="en-US" dirty="0"/>
+              <a:rPr lang="ar-SA" dirty="0">
+                <a:latin typeface="Amiri" pitchFamily="2" charset="-78"/>
+                <a:ea typeface="Amiri" pitchFamily="2" charset="-78"/>
+                <a:cs typeface="Amiri" pitchFamily="2" charset="-78"/>
+              </a:rPr>
               <a:t>TOPIC CONVERSATION — Core. Examiner asks the questions in order and may add “لِمَاذَا؟ / هَلْ يُمْكِنُ أَنْ تَشْرَحَ أَكْثَرَ؟” to push for more. Candidate aims for one full sentence per question.
 </a:t>
             </a:r>
@@ -1332,7 +1348,11 @@
           <a:lstStyle/>
           <a:p>
             <a:r>
-              <a:rPr lang="en-US" dirty="0"/>
+              <a:rPr lang="ar-SA" dirty="0">
+                <a:latin typeface="Amiri" pitchFamily="2" charset="-78"/>
+                <a:ea typeface="Amiri" pitchFamily="2" charset="-78"/>
+                <a:cs typeface="Amiri" pitchFamily="2" charset="-78"/>
+              </a:rPr>
               <a:t>TOPIC CONVERSATION — Develop. Examiner asks the questions in order and may add “لِمَاذَا؟ / هَلْ يُمْكِنُ أَنْ تَشْرَحَ أَكْثَرَ؟” to push for more. Candidate aims for two or three sentences, with a description and an opinion.
 </a:t>
             </a:r>
@@ -1421,7 +1441,11 @@
           <a:lstStyle/>
           <a:p>
             <a:r>
-              <a:rPr lang="en-US" dirty="0"/>
+              <a:rPr lang="ar-SA" dirty="0">
+                <a:latin typeface="Amiri" pitchFamily="2" charset="-78"/>
+                <a:ea typeface="Amiri" pitchFamily="2" charset="-78"/>
+                <a:cs typeface="Amiri" pitchFamily="2" charset="-78"/>
+              </a:rPr>
               <a:t>TOPIC CONVERSATION — Stretch. Examiner asks the questions in order and may add “لِمَاذَا؟ / هَلْ يُمْكِنُ أَنْ تَشْرَحَ أَكْثَرَ؟” to push for more. Candidate aims for a developed answer: opinion, comparison, concession and a conditional.
 </a:t>
             </a:r>
@@ -1510,7 +1534,11 @@
           <a:lstStyle/>
           <a:p>
             <a:r>
-              <a:rPr lang="en-US" dirty="0"/>
+              <a:rPr lang="ar-SA" dirty="0">
+                <a:latin typeface="Amiri" pitchFamily="2" charset="-78"/>
+                <a:ea typeface="Amiri" pitchFamily="2" charset="-78"/>
+                <a:cs typeface="Amiri" pitchFamily="2" charset="-78"/>
+              </a:rPr>
               <a:t>WELCOME (1 min) — while students join.
 • Greet each student by name as they arrive: السَّلَامُ عَلَيْكُمْ. Take the register (Pastoral Tracker: attendance 0/1).
 • 2-MINUTE CHECK-IN (SEND training): a private chat to any student who seemed unsettled last lesson — “Are you okay today? 👍 / 👎”.
@@ -2224,7 +2252,11 @@
           <a:lstStyle/>
           <a:p>
             <a:r>
-              <a:rPr lang="en-US" dirty="0"/>
+              <a:rPr lang="ar-SA" dirty="0">
+                <a:latin typeface="Amiri" pitchFamily="2" charset="-78"/>
+                <a:ea typeface="Amiri" pitchFamily="2" charset="-78"/>
+                <a:cs typeface="Amiri" pitchFamily="2" charset="-78"/>
+              </a:rPr>
               <a:t>TEACH (3 min). Role play = precise and complete; conversation = develop. Choral repetition of the repair phrases. To a girl: تُعِيدِي.</a:t>
             </a:r>
             <a:endParaRPr lang="en-US" dirty="0"/>
@@ -2312,7 +2344,11 @@
           <a:lstStyle/>
           <a:p>
             <a:r>
-              <a:rPr lang="en-US" dirty="0"/>
+              <a:rPr lang="ar-SA" dirty="0">
+                <a:latin typeface="Amiri" pitchFamily="2" charset="-78"/>
+                <a:ea typeface="Amiri" pitchFamily="2" charset="-78"/>
+                <a:cs typeface="Amiri" pitchFamily="2" charset="-78"/>
+              </a:rPr>
               <a:t>LANGUAGE BANK (2 min) — hollow verbs shorten in the past: زَارَ → زُرْتُ · زُرْنَا. Staying at a hotel: نَزَلْنَا فِي فُنْدُقٍ قَرِيبٍ مِنَ البَحْرِ.</a:t>
             </a:r>
             <a:endParaRPr lang="en-US" dirty="0"/>
@@ -2400,7 +2436,11 @@
           <a:lstStyle/>
           <a:p>
             <a:r>
-              <a:rPr lang="en-US" dirty="0"/>
+              <a:rPr lang="ar-SA" dirty="0">
+                <a:latin typeface="Amiri" pitchFamily="2" charset="-78"/>
+                <a:ea typeface="Amiri" pitchFamily="2" charset="-78"/>
+                <a:cs typeface="Amiri" pitchFamily="2" charset="-78"/>
+              </a:rPr>
               <a:t>LANGUAGE BANK (2 min) — two kinds of “if”: إِذَا سَافَرْتُ، سَأَزُورُ … (real) · لَوْ كَانَ عِنْدِي مَالٌ، لَسَافَرْتُ … (unreal). Non-human plurals take feminine singular: مَعَالِمُ تَارِيخِيَّةٌ.</a:t>
             </a:r>
             <a:endParaRPr lang="en-US" dirty="0"/>
@@ -2576,7 +2616,11 @@
           <a:lstStyle/>
           <a:p>
             <a:r>
-              <a:rPr lang="en-US" dirty="0"/>
+              <a:rPr lang="ar-SA" dirty="0">
+                <a:latin typeface="Amiri" pitchFamily="2" charset="-78"/>
+                <a:ea typeface="Amiri" pitchFamily="2" charset="-78"/>
+                <a:cs typeface="Amiri" pitchFamily="2" charset="-78"/>
+              </a:rPr>
               <a:t>ROLE PLAY A (Core) — phoning a hotel.
 SET-UP IN THE BREAKOUT ROOM: A = examiner (reads the left column ONLY — the questions, in order), B = candidate (sees the task column; Core may use the help column), C = observer (ticks the feedback checklist). 1 minute preparation, about 3 minutes speaking, 1 minute feedback, then rotate.
 Task ! is the unexpected question: in the exam the candidate has not seen it — the examiner should read it without warning.
@@ -2668,7 +2712,11 @@
           <a:lstStyle/>
           <a:p>
             <a:r>
-              <a:rPr lang="en-US" dirty="0"/>
+              <a:rPr lang="ar-SA" dirty="0">
+                <a:latin typeface="Amiri" pitchFamily="2" charset="-78"/>
+                <a:ea typeface="Amiri" pitchFamily="2" charset="-78"/>
+                <a:cs typeface="Amiri" pitchFamily="2" charset="-78"/>
+              </a:rPr>
               <a:t>ROLE PLAY B (Core+) — at the hotel desk.
 SET-UP IN THE BREAKOUT ROOM: A = examiner (reads the left column ONLY — the questions, in order), B = candidate (sees the task column; Core may use the help column), C = observer (ticks the feedback checklist). 1 minute preparation, about 3 minutes speaking, 1 minute feedback, then rotate.
 Task ! is the unexpected question: in the exam the candidate has not seen it — the examiner should read it without warning.
@@ -3156,6 +3204,7 @@
                   <a:srgbClr val="D4AF37"/>
                 </a:solidFill>
                 <a:latin typeface="Amiri" pitchFamily="2" charset="-78"/>
+                <a:ea typeface="Amiri" pitchFamily="2" charset="-78"/>
                 <a:cs typeface="Amiri" pitchFamily="2" charset="-78"/>
               </a:rPr>
               <a:t>م</a:t>
@@ -3362,6 +3411,7 @@
                   <a:srgbClr val="D4AF37"/>
                 </a:solidFill>
                 <a:latin typeface="Amiri" pitchFamily="2" charset="-78"/>
+                <a:ea typeface="Amiri" pitchFamily="2" charset="-78"/>
                 <a:cs typeface="Amiri" pitchFamily="2" charset="-78"/>
               </a:rPr>
               <a:t>وَرْشَةُ التَّحَدُّثِ — السَّفَرُ وَالسِّيَاحَةُ</a:t>
@@ -3819,6 +3869,7 @@
                   <a:srgbClr val="D4AF37"/>
                 </a:solidFill>
                 <a:latin typeface="Amiri" pitchFamily="2" charset="-78"/>
+                <a:ea typeface="Amiri" pitchFamily="2" charset="-78"/>
                 <a:cs typeface="Amiri" pitchFamily="2" charset="-78"/>
               </a:rPr>
               <a:t>م</a:t>
@@ -4139,6 +4190,7 @@
                   <a:srgbClr val="8A6D1E"/>
                 </a:solidFill>
                 <a:latin typeface="Amiri" pitchFamily="2" charset="-78"/>
+                <a:ea typeface="Amiri" pitchFamily="2" charset="-78"/>
                 <a:cs typeface="Amiri" pitchFamily="2" charset="-78"/>
               </a:rPr>
               <a:t>كَيْفَ كَانَتْ عُطْلَتُكَ؟</a:t>
@@ -4419,6 +4471,7 @@
                   <a:srgbClr val="1B3B6F"/>
                 </a:solidFill>
                 <a:latin typeface="Amiri" pitchFamily="2" charset="-78"/>
+                <a:ea typeface="Amiri" pitchFamily="2" charset="-78"/>
                 <a:cs typeface="Amiri" pitchFamily="2" charset="-78"/>
               </a:rPr>
               <a:t>قَضَيْتُ … فِي … مَعَ …</a:t>
@@ -4495,6 +4548,7 @@
                   <a:srgbClr val="1B3B6F"/>
                 </a:solidFill>
                 <a:latin typeface="Amiri" pitchFamily="2" charset="-78"/>
+                <a:ea typeface="Amiri" pitchFamily="2" charset="-78"/>
                 <a:cs typeface="Amiri" pitchFamily="2" charset="-78"/>
               </a:rPr>
               <a:t>أَهْلًا! أَيْنَ قَضَيْتَ العُطْلَةَ؟</a:t>
@@ -4598,6 +4652,7 @@
                   <a:srgbClr val="1B3B6F"/>
                 </a:solidFill>
                 <a:latin typeface="Amiri" pitchFamily="2" charset="-78"/>
+                <a:ea typeface="Amiri" pitchFamily="2" charset="-78"/>
                 <a:cs typeface="Amiri" pitchFamily="2" charset="-78"/>
               </a:rPr>
               <a:t>سَافَرْنَا بِالطَّائِرَةِ … وَنَزَلْنَا فِي …</a:t>
@@ -4674,6 +4729,7 @@
                   <a:srgbClr val="1B3B6F"/>
                 </a:solidFill>
                 <a:latin typeface="Amiri" pitchFamily="2" charset="-78"/>
+                <a:ea typeface="Amiri" pitchFamily="2" charset="-78"/>
                 <a:cs typeface="Amiri" pitchFamily="2" charset="-78"/>
               </a:rPr>
               <a:t>كَيْفَ سَافَرْتُمْ؟ وَأَيْنَ نَزَلْتُمْ؟</a:t>
@@ -4777,6 +4833,7 @@
                   <a:srgbClr val="1B3B6F"/>
                 </a:solidFill>
                 <a:latin typeface="Amiri" pitchFamily="2" charset="-78"/>
+                <a:ea typeface="Amiri" pitchFamily="2" charset="-78"/>
                 <a:cs typeface="Amiri" pitchFamily="2" charset="-78"/>
               </a:rPr>
               <a:t>أَجْمَلُ شَيْءٍ كَانَ … لِأَنَّ …</a:t>
@@ -4853,6 +4910,7 @@
                   <a:srgbClr val="1B3B6F"/>
                 </a:solidFill>
                 <a:latin typeface="Amiri" pitchFamily="2" charset="-78"/>
+                <a:ea typeface="Amiri" pitchFamily="2" charset="-78"/>
                 <a:cs typeface="Amiri" pitchFamily="2" charset="-78"/>
               </a:rPr>
               <a:t>مَا أَجْمَلُ شَيْءٍ رَأَيْتَهُ؟</a:t>
@@ -4956,6 +5014,7 @@
                   <a:srgbClr val="1B3B6F"/>
                 </a:solidFill>
                 <a:latin typeface="Amiri" pitchFamily="2" charset="-78"/>
+                <a:ea typeface="Amiri" pitchFamily="2" charset="-78"/>
                 <a:cs typeface="Amiri" pitchFamily="2" charset="-78"/>
               </a:rPr>
               <a:t>نَعَمْ، ضَاعَتْ … فَانْتَظَرْنَا …</a:t>
@@ -5032,6 +5091,7 @@
                   <a:srgbClr val="1B3B6F"/>
                 </a:solidFill>
                 <a:latin typeface="Amiri" pitchFamily="2" charset="-78"/>
+                <a:ea typeface="Amiri" pitchFamily="2" charset="-78"/>
                 <a:cs typeface="Amiri" pitchFamily="2" charset="-78"/>
               </a:rPr>
               <a:t>هَلْ حَدَثَتْ أَيُّ مُشْكِلَةٍ؟</a:t>
@@ -5135,6 +5195,7 @@
                   <a:srgbClr val="1B3B6F"/>
                 </a:solidFill>
                 <a:latin typeface="Amiri" pitchFamily="2" charset="-78"/>
+                <a:ea typeface="Amiri" pitchFamily="2" charset="-78"/>
                 <a:cs typeface="Amiri" pitchFamily="2" charset="-78"/>
               </a:rPr>
               <a:t>نَعَمْ، إِذَا ذَهَبَ … يَجِبُ أَنْ …</a:t>
@@ -5211,6 +5272,7 @@
                   <a:srgbClr val="1B3B6F"/>
                 </a:solidFill>
                 <a:latin typeface="Amiri" pitchFamily="2" charset="-78"/>
+                <a:ea typeface="Amiri" pitchFamily="2" charset="-78"/>
                 <a:cs typeface="Amiri" pitchFamily="2" charset="-78"/>
               </a:rPr>
               <a:t>هَلْ تَنْصَحُ صَدِيقَكَ بِزِيَارَتِهَا؟</a:t>
@@ -5420,6 +5482,7 @@
                   <a:srgbClr val="D4AF37"/>
                 </a:solidFill>
                 <a:latin typeface="Amiri" pitchFamily="2" charset="-78"/>
+                <a:ea typeface="Amiri" pitchFamily="2" charset="-78"/>
                 <a:cs typeface="Amiri" pitchFamily="2" charset="-78"/>
               </a:rPr>
               <a:t>م</a:t>
@@ -5740,6 +5803,7 @@
                   <a:srgbClr val="8A6D1E"/>
                 </a:solidFill>
                 <a:latin typeface="Amiri" pitchFamily="2" charset="-78"/>
+                <a:ea typeface="Amiri" pitchFamily="2" charset="-78"/>
                 <a:cs typeface="Amiri" pitchFamily="2" charset="-78"/>
               </a:rPr>
               <a:t>السِّيَاحَةُ: نِعْمَةٌ أَمْ مُشْكِلَةٌ؟</a:t>
@@ -6020,6 +6084,7 @@
                   <a:srgbClr val="1B3B6F"/>
                 </a:solidFill>
                 <a:latin typeface="Amiri" pitchFamily="2" charset="-78"/>
+                <a:ea typeface="Amiri" pitchFamily="2" charset="-78"/>
                 <a:cs typeface="Amiri" pitchFamily="2" charset="-78"/>
               </a:rPr>
               <a:t>لِأَنَّهُ … وَلِأَنَّهُ …</a:t>
@@ -6096,6 +6161,7 @@
                   <a:srgbClr val="1B3B6F"/>
                 </a:solidFill>
                 <a:latin typeface="Amiri" pitchFamily="2" charset="-78"/>
+                <a:ea typeface="Amiri" pitchFamily="2" charset="-78"/>
                 <a:cs typeface="Amiri" pitchFamily="2" charset="-78"/>
               </a:rPr>
               <a:t>لِمَاذَا يُحِبُّ النَّاسُ السَّفَرَ فِي رَأْيِكَ؟</a:t>
@@ -6199,6 +6265,7 @@
                   <a:srgbClr val="1B3B6F"/>
                 </a:solidFill>
                 <a:latin typeface="Amiri" pitchFamily="2" charset="-78"/>
+                <a:ea typeface="Amiri" pitchFamily="2" charset="-78"/>
                 <a:cs typeface="Amiri" pitchFamily="2" charset="-78"/>
               </a:rPr>
               <a:t>نَعَمْ، مِثْلًا …</a:t>
@@ -6275,6 +6342,7 @@
                   <a:srgbClr val="1B3B6F"/>
                 </a:solidFill>
                 <a:latin typeface="Amiri" pitchFamily="2" charset="-78"/>
+                <a:ea typeface="Amiri" pitchFamily="2" charset="-78"/>
                 <a:cs typeface="Amiri" pitchFamily="2" charset="-78"/>
               </a:rPr>
               <a:t>هَلْ لِلسِّيَاحَةِ سَلْبِيَّاتٌ؟</a:t>
@@ -6378,6 +6446,7 @@
                   <a:srgbClr val="1B3B6F"/>
                 </a:solidFill>
                 <a:latin typeface="Amiri" pitchFamily="2" charset="-78"/>
+                <a:ea typeface="Amiri" pitchFamily="2" charset="-78"/>
                 <a:cs typeface="Amiri" pitchFamily="2" charset="-78"/>
               </a:rPr>
               <a:t>كَانَ السَّفَرُ … أَمَّا اليَوْمَ فَنَحْجِزُ …</a:t>
@@ -6454,6 +6523,7 @@
                   <a:srgbClr val="1B3B6F"/>
                 </a:solidFill>
                 <a:latin typeface="Amiri" pitchFamily="2" charset="-78"/>
+                <a:ea typeface="Amiri" pitchFamily="2" charset="-78"/>
                 <a:cs typeface="Amiri" pitchFamily="2" charset="-78"/>
               </a:rPr>
               <a:t>كَيْفَ تَغَيَّرَ السَّفَرُ مُنْذُ أَيَّامِ أَجْدَادِنَا؟</a:t>
@@ -6557,6 +6627,7 @@
                   <a:srgbClr val="1B3B6F"/>
                 </a:solidFill>
                 <a:latin typeface="Amiri" pitchFamily="2" charset="-78"/>
+                <a:ea typeface="Amiri" pitchFamily="2" charset="-78"/>
                 <a:cs typeface="Amiri" pitchFamily="2" charset="-78"/>
               </a:rPr>
               <a:t>صَحِيحٌ أَنَّ … غَيْرَ أَنَّ …</a:t>
@@ -6633,6 +6704,7 @@
                   <a:srgbClr val="1B3B6F"/>
                 </a:solidFill>
                 <a:latin typeface="Amiri" pitchFamily="2" charset="-78"/>
+                <a:ea typeface="Amiri" pitchFamily="2" charset="-78"/>
                 <a:cs typeface="Amiri" pitchFamily="2" charset="-78"/>
               </a:rPr>
               <a:t>هَلْ يَجِبُ أَنْ نُقَلِّلَ السَّفَرَ بِالطَّائِرَةِ؟</a:t>
@@ -6736,6 +6808,7 @@
                   <a:srgbClr val="1B3B6F"/>
                 </a:solidFill>
                 <a:latin typeface="Amiri" pitchFamily="2" charset="-78"/>
+                <a:ea typeface="Amiri" pitchFamily="2" charset="-78"/>
                 <a:cs typeface="Amiri" pitchFamily="2" charset="-78"/>
               </a:rPr>
               <a:t>لَوْ رَبِحْتُ …، لَذَهَبْتُ …</a:t>
@@ -6812,6 +6885,7 @@
                   <a:srgbClr val="1B3B6F"/>
                 </a:solidFill>
                 <a:latin typeface="Amiri" pitchFamily="2" charset="-78"/>
+                <a:ea typeface="Amiri" pitchFamily="2" charset="-78"/>
                 <a:cs typeface="Amiri" pitchFamily="2" charset="-78"/>
               </a:rPr>
               <a:t>لَوْ رَبِحْتَ رِحْلَةً مَجَّانِيَّةً، أَيْنَ تَذْهَبُ؟</a:t>
@@ -7021,6 +7095,7 @@
                   <a:srgbClr val="D4AF37"/>
                 </a:solidFill>
                 <a:latin typeface="Amiri" pitchFamily="2" charset="-78"/>
+                <a:ea typeface="Amiri" pitchFamily="2" charset="-78"/>
                 <a:cs typeface="Amiri" pitchFamily="2" charset="-78"/>
               </a:rPr>
               <a:t>م</a:t>
@@ -7341,6 +7416,7 @@
                   <a:srgbClr val="8A6D1E"/>
                 </a:solidFill>
                 <a:latin typeface="Amiri" pitchFamily="2" charset="-78"/>
+                <a:ea typeface="Amiri" pitchFamily="2" charset="-78"/>
                 <a:cs typeface="Amiri" pitchFamily="2" charset="-78"/>
               </a:rPr>
               <a:t>وَرَقَةُ المُلَاحِظِ</a:t>
@@ -8811,6 +8887,7 @@
                   <a:srgbClr val="D4AF37"/>
                 </a:solidFill>
                 <a:latin typeface="Amiri" pitchFamily="2" charset="-78"/>
+                <a:ea typeface="Amiri" pitchFamily="2" charset="-78"/>
                 <a:cs typeface="Amiri" pitchFamily="2" charset="-78"/>
               </a:rPr>
               <a:t>م</a:t>
@@ -9131,6 +9208,7 @@
                   <a:srgbClr val="8A6D1E"/>
                 </a:solidFill>
                 <a:latin typeface="Amiri" pitchFamily="2" charset="-78"/>
+                <a:ea typeface="Amiri" pitchFamily="2" charset="-78"/>
                 <a:cs typeface="Amiri" pitchFamily="2" charset="-78"/>
               </a:rPr>
               <a:t>نَمُوذَجُ الإِجَابَةِ</a:t>
@@ -9373,6 +9451,7 @@
                   <a:srgbClr val="1B3B6F"/>
                 </a:solidFill>
                 <a:latin typeface="Amiri" pitchFamily="2" charset="-78"/>
+                <a:ea typeface="Amiri" pitchFamily="2" charset="-78"/>
                 <a:cs typeface="Amiri" pitchFamily="2" charset="-78"/>
               </a:rPr>
               <a:t>مَسَاءُ الخَيْرِ، أُرِيدُ أَنْ أَحْجِزَ غُرْفَةً، مِنْ فَضْلِكَ.</a:t>
@@ -9449,6 +9528,7 @@
                   <a:srgbClr val="1B3B6F"/>
                 </a:solidFill>
                 <a:latin typeface="Amiri" pitchFamily="2" charset="-78"/>
+                <a:ea typeface="Amiri" pitchFamily="2" charset="-78"/>
                 <a:cs typeface="Amiri" pitchFamily="2" charset="-78"/>
               </a:rPr>
               <a:t>فُنْدُقُ البَحْرِ، تَفَضَّلْ.</a:t>
@@ -9552,6 +9632,7 @@
                   <a:srgbClr val="1B3B6F"/>
                 </a:solidFill>
                 <a:latin typeface="Amiri" pitchFamily="2" charset="-78"/>
+                <a:ea typeface="Amiri" pitchFamily="2" charset="-78"/>
                 <a:cs typeface="Amiri" pitchFamily="2" charset="-78"/>
               </a:rPr>
               <a:t>غُرْفَةٌ مُزْدَوِجَةٌ لِشَخْصَيْنِ: أَنَا وَأَخِي.</a:t>
@@ -9628,6 +9709,7 @@
                   <a:srgbClr val="1B3B6F"/>
                 </a:solidFill>
                 <a:latin typeface="Amiri" pitchFamily="2" charset="-78"/>
+                <a:ea typeface="Amiri" pitchFamily="2" charset="-78"/>
                 <a:cs typeface="Amiri" pitchFamily="2" charset="-78"/>
               </a:rPr>
               <a:t>غُرْفَةٌ مُفْرَدَةٌ أَمْ مُزْدَوِجَةٌ؟</a:t>
@@ -9731,6 +9813,7 @@
                   <a:srgbClr val="1B3B6F"/>
                 </a:solidFill>
                 <a:latin typeface="Amiri" pitchFamily="2" charset="-78"/>
+                <a:ea typeface="Amiri" pitchFamily="2" charset="-78"/>
                 <a:cs typeface="Amiri" pitchFamily="2" charset="-78"/>
               </a:rPr>
               <a:t>ثَلَاثَ لَيَالٍ، مِنْ يَوْمِ الخَمِيسِ إِلَى يَوْمِ الأَحَدِ.</a:t>
@@ -9807,6 +9890,7 @@
                   <a:srgbClr val="1B3B6F"/>
                 </a:solidFill>
                 <a:latin typeface="Amiri" pitchFamily="2" charset="-78"/>
+                <a:ea typeface="Amiri" pitchFamily="2" charset="-78"/>
                 <a:cs typeface="Amiri" pitchFamily="2" charset="-78"/>
               </a:rPr>
               <a:t>كَمْ لَيْلَةً؟</a:t>
@@ -9910,6 +9994,7 @@
                   <a:srgbClr val="1B3B6F"/>
                 </a:solidFill>
                 <a:latin typeface="Amiri" pitchFamily="2" charset="-78"/>
+                <a:ea typeface="Amiri" pitchFamily="2" charset="-78"/>
                 <a:cs typeface="Amiri" pitchFamily="2" charset="-78"/>
               </a:rPr>
               <a:t>نَعَمْ، مِنْ فَضْلِكَ، لِأَنَّ المَنْظَرَ جَمِيلٌ.</a:t>
@@ -9986,6 +10071,7 @@
                   <a:srgbClr val="1B3B6F"/>
                 </a:solidFill>
                 <a:latin typeface="Amiri" pitchFamily="2" charset="-78"/>
+                <a:ea typeface="Amiri" pitchFamily="2" charset="-78"/>
                 <a:cs typeface="Amiri" pitchFamily="2" charset="-78"/>
               </a:rPr>
               <a:t>هَلْ تُرِيدُ غُرْفَةً تُطِلُّ عَلَى البَحْرِ؟</a:t>
@@ -10089,6 +10175,7 @@
                   <a:srgbClr val="1B3B6F"/>
                 </a:solidFill>
                 <a:latin typeface="Amiri" pitchFamily="2" charset="-78"/>
+                <a:ea typeface="Amiri" pitchFamily="2" charset="-78"/>
                 <a:cs typeface="Amiri" pitchFamily="2" charset="-78"/>
               </a:rPr>
               <a:t>سَأَصِلُ فِي السَّاعَةِ الخَامِسَةِ مَسَاءً تَقْرِيبًا.</a:t>
@@ -10165,6 +10252,7 @@
                   <a:srgbClr val="1B3B6F"/>
                 </a:solidFill>
                 <a:latin typeface="Amiri" pitchFamily="2" charset="-78"/>
+                <a:ea typeface="Amiri" pitchFamily="2" charset="-78"/>
                 <a:cs typeface="Amiri" pitchFamily="2" charset="-78"/>
               </a:rPr>
               <a:t>مَتَى سَتَصِلُ إِلَى الفُنْدُقِ؟</a:t>
@@ -10374,6 +10462,7 @@
                   <a:srgbClr val="D4AF37"/>
                 </a:solidFill>
                 <a:latin typeface="Amiri" pitchFamily="2" charset="-78"/>
+                <a:ea typeface="Amiri" pitchFamily="2" charset="-78"/>
                 <a:cs typeface="Amiri" pitchFamily="2" charset="-78"/>
               </a:rPr>
               <a:t>م</a:t>
@@ -10694,6 +10783,7 @@
                   <a:srgbClr val="8A6D1E"/>
                 </a:solidFill>
                 <a:latin typeface="Amiri" pitchFamily="2" charset="-78"/>
+                <a:ea typeface="Amiri" pitchFamily="2" charset="-78"/>
                 <a:cs typeface="Amiri" pitchFamily="2" charset="-78"/>
               </a:rPr>
               <a:t>نَمُوذَجُ الإِجَابَةِ</a:t>
@@ -10936,6 +11026,7 @@
                   <a:srgbClr val="1B3B6F"/>
                 </a:solidFill>
                 <a:latin typeface="Amiri" pitchFamily="2" charset="-78"/>
+                <a:ea typeface="Amiri" pitchFamily="2" charset="-78"/>
                 <a:cs typeface="Amiri" pitchFamily="2" charset="-78"/>
               </a:rPr>
               <a:t>نَعَمْ، المُكَيِّفُ فِي غُرْفَتِي لَا يَعْمَلُ، وَالجَوُّ حَارٌّ جِدًّا.</a:t>
@@ -11012,6 +11103,7 @@
                   <a:srgbClr val="1B3B6F"/>
                 </a:solidFill>
                 <a:latin typeface="Amiri" pitchFamily="2" charset="-78"/>
+                <a:ea typeface="Amiri" pitchFamily="2" charset="-78"/>
                 <a:cs typeface="Amiri" pitchFamily="2" charset="-78"/>
               </a:rPr>
               <a:t>مَسَاءُ الخَيْرِ، هَلْ هُنَاكَ مُشْكِلَةٌ؟</a:t>
@@ -11115,6 +11207,7 @@
                   <a:srgbClr val="1B3B6F"/>
                 </a:solidFill>
                 <a:latin typeface="Amiri" pitchFamily="2" charset="-78"/>
+                <a:ea typeface="Amiri" pitchFamily="2" charset="-78"/>
                 <a:cs typeface="Amiri" pitchFamily="2" charset="-78"/>
               </a:rPr>
               <a:t>غُرْفَةٌ رَقْمُ مِئَتَيْنِ وَخَمْسَةٍ، فِي الطَّابِقِ الثَّانِي.</a:t>
@@ -11191,6 +11284,7 @@
                   <a:srgbClr val="1B3B6F"/>
                 </a:solidFill>
                 <a:latin typeface="Amiri" pitchFamily="2" charset="-78"/>
+                <a:ea typeface="Amiri" pitchFamily="2" charset="-78"/>
                 <a:cs typeface="Amiri" pitchFamily="2" charset="-78"/>
               </a:rPr>
               <a:t>مَا رَقْمُ غُرْفَتِكَ؟</a:t>
@@ -11294,6 +11388,7 @@
                   <a:srgbClr val="1B3B6F"/>
                 </a:solidFill>
                 <a:latin typeface="Amiri" pitchFamily="2" charset="-78"/>
+                <a:ea typeface="Amiri" pitchFamily="2" charset="-78"/>
                 <a:cs typeface="Amiri" pitchFamily="2" charset="-78"/>
               </a:rPr>
               <a:t>هَلْ يُمْكِنُ أَنْ تُعْطِيَنِي غُرْفَةً أُخْرَى اللَّيْلَةَ؟</a:t>
@@ -11370,6 +11465,7 @@
                   <a:srgbClr val="1B3B6F"/>
                 </a:solidFill>
                 <a:latin typeface="Amiri" pitchFamily="2" charset="-78"/>
+                <a:ea typeface="Amiri" pitchFamily="2" charset="-78"/>
                 <a:cs typeface="Amiri" pitchFamily="2" charset="-78"/>
               </a:rPr>
               <a:t>سَنُرْسِلُ مُوَظَّفًا غَدًا.</a:t>
@@ -11473,6 +11569,7 @@
                   <a:srgbClr val="1B3B6F"/>
                 </a:solidFill>
                 <a:latin typeface="Amiri" pitchFamily="2" charset="-78"/>
+                <a:ea typeface="Amiri" pitchFamily="2" charset="-78"/>
                 <a:cs typeface="Amiri" pitchFamily="2" charset="-78"/>
               </a:rPr>
               <a:t>شُكْرًا جَزِيلًا. وَمَتَى يَبْدَأُ الفُطُورُ فِي الصَّبَاحِ؟</a:t>
@@ -11549,6 +11646,7 @@
                   <a:srgbClr val="1B3B6F"/>
                 </a:solidFill>
                 <a:latin typeface="Amiri" pitchFamily="2" charset="-78"/>
+                <a:ea typeface="Amiri" pitchFamily="2" charset="-78"/>
                 <a:cs typeface="Amiri" pitchFamily="2" charset="-78"/>
               </a:rPr>
               <a:t>طَبْعًا. عِنْدَنَا غُرْفَةٌ فِي الطَّابِقِ الخَامِسِ.</a:t>
@@ -11652,6 +11750,7 @@
                   <a:srgbClr val="1B3B6F"/>
                 </a:solidFill>
                 <a:latin typeface="Amiri" pitchFamily="2" charset="-78"/>
+                <a:ea typeface="Amiri" pitchFamily="2" charset="-78"/>
                 <a:cs typeface="Amiri" pitchFamily="2" charset="-78"/>
               </a:rPr>
               <a:t>زُرْتُ القَلْعَةَ وَالسُّوقَ القَدِيمَ، وَكَانَ كُلُّ شَيْءٍ رَائِعًا.</a:t>
@@ -11728,6 +11827,7 @@
                   <a:srgbClr val="1B3B6F"/>
                 </a:solidFill>
                 <a:latin typeface="Amiri" pitchFamily="2" charset="-78"/>
+                <a:ea typeface="Amiri" pitchFamily="2" charset="-78"/>
                 <a:cs typeface="Amiri" pitchFamily="2" charset="-78"/>
               </a:rPr>
               <a:t>كَيْفَ وَجَدْتَ مَدِينَتَنَا حَتَّى الآنَ؟</a:t>
@@ -11937,6 +12037,7 @@
                   <a:srgbClr val="D4AF37"/>
                 </a:solidFill>
                 <a:latin typeface="Amiri" pitchFamily="2" charset="-78"/>
+                <a:ea typeface="Amiri" pitchFamily="2" charset="-78"/>
                 <a:cs typeface="Amiri" pitchFamily="2" charset="-78"/>
               </a:rPr>
               <a:t>م</a:t>
@@ -12257,6 +12358,7 @@
                   <a:srgbClr val="8A6D1E"/>
                 </a:solidFill>
                 <a:latin typeface="Amiri" pitchFamily="2" charset="-78"/>
+                <a:ea typeface="Amiri" pitchFamily="2" charset="-78"/>
                 <a:cs typeface="Amiri" pitchFamily="2" charset="-78"/>
               </a:rPr>
               <a:t>نَمُوذَجُ الإِجَابَةِ</a:t>
@@ -12499,6 +12601,7 @@
                   <a:srgbClr val="1B3B6F"/>
                 </a:solidFill>
                 <a:latin typeface="Amiri" pitchFamily="2" charset="-78"/>
+                <a:ea typeface="Amiri" pitchFamily="2" charset="-78"/>
                 <a:cs typeface="Amiri" pitchFamily="2" charset="-78"/>
               </a:rPr>
               <a:t>قَضَيْتُ أُسْبُوعًا فِي إِسْطَنْبُولَ مَعَ أُسْرَتِي.</a:t>
@@ -12575,6 +12678,7 @@
                   <a:srgbClr val="1B3B6F"/>
                 </a:solidFill>
                 <a:latin typeface="Amiri" pitchFamily="2" charset="-78"/>
+                <a:ea typeface="Amiri" pitchFamily="2" charset="-78"/>
                 <a:cs typeface="Amiri" pitchFamily="2" charset="-78"/>
               </a:rPr>
               <a:t>أَهْلًا! أَيْنَ قَضَيْتَ العُطْلَةَ؟</a:t>
@@ -12678,6 +12782,7 @@
                   <a:srgbClr val="1B3B6F"/>
                 </a:solidFill>
                 <a:latin typeface="Amiri" pitchFamily="2" charset="-78"/>
+                <a:ea typeface="Amiri" pitchFamily="2" charset="-78"/>
                 <a:cs typeface="Amiri" pitchFamily="2" charset="-78"/>
               </a:rPr>
               <a:t>سَافَرْنَا بِالطَّائِرَةِ، وَنَزَلْنَا فِي فُنْدُقٍ صَغِيرٍ قَرِيبٍ مِنَ البَحْرِ.</a:t>
@@ -12754,6 +12859,7 @@
                   <a:srgbClr val="1B3B6F"/>
                 </a:solidFill>
                 <a:latin typeface="Amiri" pitchFamily="2" charset="-78"/>
+                <a:ea typeface="Amiri" pitchFamily="2" charset="-78"/>
                 <a:cs typeface="Amiri" pitchFamily="2" charset="-78"/>
               </a:rPr>
               <a:t>كَيْفَ سَافَرْتُمْ؟ وَأَيْنَ نَزَلْتُمْ؟</a:t>
@@ -12857,6 +12963,7 @@
                   <a:srgbClr val="1B3B6F"/>
                 </a:solidFill>
                 <a:latin typeface="Amiri" pitchFamily="2" charset="-78"/>
+                <a:ea typeface="Amiri" pitchFamily="2" charset="-78"/>
                 <a:cs typeface="Amiri" pitchFamily="2" charset="-78"/>
               </a:rPr>
               <a:t>أَجْمَلُ شَيْءٍ كَانَ المَسْجِدَ الأَزْرَقَ، لِأَنَّهُ ضَخْمٌ وَمُزَيَّنٌ بِأَلْوَانٍ رَائِعَةٍ.</a:t>
@@ -12933,6 +13040,7 @@
                   <a:srgbClr val="1B3B6F"/>
                 </a:solidFill>
                 <a:latin typeface="Amiri" pitchFamily="2" charset="-78"/>
+                <a:ea typeface="Amiri" pitchFamily="2" charset="-78"/>
                 <a:cs typeface="Amiri" pitchFamily="2" charset="-78"/>
               </a:rPr>
               <a:t>مَا أَجْمَلُ شَيْءٍ رَأَيْتَهُ؟</a:t>
@@ -13036,6 +13144,7 @@
                   <a:srgbClr val="1B3B6F"/>
                 </a:solidFill>
                 <a:latin typeface="Amiri" pitchFamily="2" charset="-78"/>
+                <a:ea typeface="Amiri" pitchFamily="2" charset="-78"/>
                 <a:cs typeface="Amiri" pitchFamily="2" charset="-78"/>
               </a:rPr>
               <a:t>نَعَمْ، ضَاعَتْ حَقِيبَةُ أُخْتِي فِي المَطَارِ، فَانْتَظَرْنَا سَاعَتَيْنِ حَتَّى وَجَدُوهَا.</a:t>
@@ -13112,6 +13221,7 @@
                   <a:srgbClr val="1B3B6F"/>
                 </a:solidFill>
                 <a:latin typeface="Amiri" pitchFamily="2" charset="-78"/>
+                <a:ea typeface="Amiri" pitchFamily="2" charset="-78"/>
                 <a:cs typeface="Amiri" pitchFamily="2" charset="-78"/>
               </a:rPr>
               <a:t>هَلْ حَدَثَتْ أَيُّ مُشْكِلَةٍ؟</a:t>
@@ -13215,6 +13325,7 @@
                   <a:srgbClr val="1B3B6F"/>
                 </a:solidFill>
                 <a:latin typeface="Amiri" pitchFamily="2" charset="-78"/>
+                <a:ea typeface="Amiri" pitchFamily="2" charset="-78"/>
                 <a:cs typeface="Amiri" pitchFamily="2" charset="-78"/>
               </a:rPr>
               <a:t>نَعَمْ، وَإِذَا ذَهَبَ فِي الرَّبِيعِ، فَيَجِبُ أَنْ يَرْكَبَ القَارِبَ فِي البُوسْفُورِ.</a:t>
@@ -13291,6 +13402,7 @@
                   <a:srgbClr val="1B3B6F"/>
                 </a:solidFill>
                 <a:latin typeface="Amiri" pitchFamily="2" charset="-78"/>
+                <a:ea typeface="Amiri" pitchFamily="2" charset="-78"/>
                 <a:cs typeface="Amiri" pitchFamily="2" charset="-78"/>
               </a:rPr>
               <a:t>هَلْ تَنْصَحُ صَدِيقَكَ بِزِيَارَتِهَا؟</a:t>
@@ -13500,6 +13612,7 @@
                   <a:srgbClr val="D4AF37"/>
                 </a:solidFill>
                 <a:latin typeface="Amiri" pitchFamily="2" charset="-78"/>
+                <a:ea typeface="Amiri" pitchFamily="2" charset="-78"/>
                 <a:cs typeface="Amiri" pitchFamily="2" charset="-78"/>
               </a:rPr>
               <a:t>م</a:t>
@@ -13820,6 +13933,7 @@
                   <a:srgbClr val="8A6D1E"/>
                 </a:solidFill>
                 <a:latin typeface="Amiri" pitchFamily="2" charset="-78"/>
+                <a:ea typeface="Amiri" pitchFamily="2" charset="-78"/>
                 <a:cs typeface="Amiri" pitchFamily="2" charset="-78"/>
               </a:rPr>
               <a:t>نَمُوذَجُ الإِجَابَةِ</a:t>
@@ -14062,6 +14176,7 @@
                   <a:srgbClr val="1B3B6F"/>
                 </a:solidFill>
                 <a:latin typeface="Amiri" pitchFamily="2" charset="-78"/>
+                <a:ea typeface="Amiri" pitchFamily="2" charset="-78"/>
                 <a:cs typeface="Amiri" pitchFamily="2" charset="-78"/>
               </a:rPr>
               <a:t>لِأَنَّهُ يُبْعِدُنَا عَنْ ضَغْطِ الحَيَاةِ اليَوْمِيَّةِ، وَلِأَنَّهُ يُعَرِّفُنَا بِثَقَافَاتٍ جَدِيدَةٍ.</a:t>
@@ -14138,6 +14253,7 @@
                   <a:srgbClr val="1B3B6F"/>
                 </a:solidFill>
                 <a:latin typeface="Amiri" pitchFamily="2" charset="-78"/>
+                <a:ea typeface="Amiri" pitchFamily="2" charset="-78"/>
                 <a:cs typeface="Amiri" pitchFamily="2" charset="-78"/>
               </a:rPr>
               <a:t>لِمَاذَا يُحِبُّ النَّاسُ السَّفَرَ فِي رَأْيِكَ؟</a:t>
@@ -14241,6 +14357,7 @@
                   <a:srgbClr val="1B3B6F"/>
                 </a:solidFill>
                 <a:latin typeface="Amiri" pitchFamily="2" charset="-78"/>
+                <a:ea typeface="Amiri" pitchFamily="2" charset="-78"/>
                 <a:cs typeface="Amiri" pitchFamily="2" charset="-78"/>
               </a:rPr>
               <a:t>نَعَمْ، مِثْلًا تَزْدَحِمُ المُدُنُ القَدِيمَةُ بِالسُّيَّاحِ، فَيَرْتَفِعُ سِعْرُ السَّكَنِ عَلَى أَهْلِهَا.</a:t>
@@ -14317,6 +14434,7 @@
                   <a:srgbClr val="1B3B6F"/>
                 </a:solidFill>
                 <a:latin typeface="Amiri" pitchFamily="2" charset="-78"/>
+                <a:ea typeface="Amiri" pitchFamily="2" charset="-78"/>
                 <a:cs typeface="Amiri" pitchFamily="2" charset="-78"/>
               </a:rPr>
               <a:t>هَلْ لِلسِّيَاحَةِ سَلْبِيَّاتٌ؟</a:t>
@@ -14420,6 +14538,7 @@
                   <a:srgbClr val="1B3B6F"/>
                 </a:solidFill>
                 <a:latin typeface="Amiri" pitchFamily="2" charset="-78"/>
+                <a:ea typeface="Amiri" pitchFamily="2" charset="-78"/>
                 <a:cs typeface="Amiri" pitchFamily="2" charset="-78"/>
               </a:rPr>
               <a:t>كَانَ السَّفَرُ صَعْبًا وَغَالِيًا، أَمَّا اليَوْمَ فَنَحْجِزُ الرِّحْلَةَ وَالفُنْدُقَ بِالهَاتِفِ فِي دَقَائِقَ.</a:t>
@@ -14496,6 +14615,7 @@
                   <a:srgbClr val="1B3B6F"/>
                 </a:solidFill>
                 <a:latin typeface="Amiri" pitchFamily="2" charset="-78"/>
+                <a:ea typeface="Amiri" pitchFamily="2" charset="-78"/>
                 <a:cs typeface="Amiri" pitchFamily="2" charset="-78"/>
               </a:rPr>
               <a:t>كَيْفَ تَغَيَّرَ السَّفَرُ مُنْذُ أَيَّامِ أَجْدَادِنَا؟</a:t>
@@ -14599,6 +14719,7 @@
                   <a:srgbClr val="1B3B6F"/>
                 </a:solidFill>
                 <a:latin typeface="Amiri" pitchFamily="2" charset="-78"/>
+                <a:ea typeface="Amiri" pitchFamily="2" charset="-78"/>
                 <a:cs typeface="Amiri" pitchFamily="2" charset="-78"/>
               </a:rPr>
               <a:t>صَحِيحٌ أَنَّ الطَّائِرَاتِ تُلَوِّثُ البِيئَةَ، غَيْرَ أَنَّنَا نَسْتَطِيعُ أَنْ نُسَافِرَ أَقَلَّ وَنَبْقَى مُدَّةً أَطْوَلَ.</a:t>
@@ -14675,6 +14796,7 @@
                   <a:srgbClr val="1B3B6F"/>
                 </a:solidFill>
                 <a:latin typeface="Amiri" pitchFamily="2" charset="-78"/>
+                <a:ea typeface="Amiri" pitchFamily="2" charset="-78"/>
                 <a:cs typeface="Amiri" pitchFamily="2" charset="-78"/>
               </a:rPr>
               <a:t>هَلْ يَجِبُ أَنْ نُقَلِّلَ السَّفَرَ بِالطَّائِرَةِ؟</a:t>
@@ -14778,6 +14900,7 @@
                   <a:srgbClr val="1B3B6F"/>
                 </a:solidFill>
                 <a:latin typeface="Amiri" pitchFamily="2" charset="-78"/>
+                <a:ea typeface="Amiri" pitchFamily="2" charset="-78"/>
                 <a:cs typeface="Amiri" pitchFamily="2" charset="-78"/>
               </a:rPr>
               <a:t>لَوْ رَبِحْتُ رِحْلَةً مَجَّانِيَّةً، لَذَهَبْتُ إِلَى المَغْرِبِ، لِأَزُورَ فَاسَ وَأَتَعَلَّمَ صِنَاعَةَ الفَخَّارِ.</a:t>
@@ -14854,6 +14977,7 @@
                   <a:srgbClr val="1B3B6F"/>
                 </a:solidFill>
                 <a:latin typeface="Amiri" pitchFamily="2" charset="-78"/>
+                <a:ea typeface="Amiri" pitchFamily="2" charset="-78"/>
                 <a:cs typeface="Amiri" pitchFamily="2" charset="-78"/>
               </a:rPr>
               <a:t>لَوْ رَبِحْتَ رِحْلَةً مَجَّانِيَّةً، أَيْنَ تَذْهَبُ؟</a:t>
@@ -15063,6 +15187,7 @@
                   <a:srgbClr val="D4AF37"/>
                 </a:solidFill>
                 <a:latin typeface="Amiri" pitchFamily="2" charset="-78"/>
+                <a:ea typeface="Amiri" pitchFamily="2" charset="-78"/>
                 <a:cs typeface="Amiri" pitchFamily="2" charset="-78"/>
               </a:rPr>
               <a:t>م</a:t>
@@ -15383,6 +15508,7 @@
                   <a:srgbClr val="8A6D1E"/>
                 </a:solidFill>
                 <a:latin typeface="Amiri" pitchFamily="2" charset="-78"/>
+                <a:ea typeface="Amiri" pitchFamily="2" charset="-78"/>
                 <a:cs typeface="Amiri" pitchFamily="2" charset="-78"/>
               </a:rPr>
               <a:t>عُطْلَتِي</a:t>
@@ -15663,6 +15789,7 @@
                   <a:srgbClr val="1B3B6F"/>
                 </a:solidFill>
                 <a:latin typeface="Amiri" pitchFamily="2" charset="-78"/>
+                <a:ea typeface="Amiri" pitchFamily="2" charset="-78"/>
                 <a:cs typeface="Amiri" pitchFamily="2" charset="-78"/>
               </a:rPr>
               <a:t>سَافَرْتُ إِلَى …</a:t>
@@ -15739,6 +15866,7 @@
                   <a:srgbClr val="1B3B6F"/>
                 </a:solidFill>
                 <a:latin typeface="Amiri" pitchFamily="2" charset="-78"/>
+                <a:ea typeface="Amiri" pitchFamily="2" charset="-78"/>
                 <a:cs typeface="Amiri" pitchFamily="2" charset="-78"/>
               </a:rPr>
               <a:t>أَيْنَ سَافَرْتَ فِي الصَّيْفِ المَاضِي؟</a:t>
@@ -15907,6 +16035,7 @@
                   <a:srgbClr val="1B3B6F"/>
                 </a:solidFill>
                 <a:latin typeface="Amiri" pitchFamily="2" charset="-78"/>
+                <a:ea typeface="Amiri" pitchFamily="2" charset="-78"/>
                 <a:cs typeface="Amiri" pitchFamily="2" charset="-78"/>
               </a:rPr>
               <a:t>سَافَرْنَا بِالطَّائِرَةِ / بِالسَّيَّارَةِ …</a:t>
@@ -15983,6 +16112,7 @@
                   <a:srgbClr val="1B3B6F"/>
                 </a:solidFill>
                 <a:latin typeface="Amiri" pitchFamily="2" charset="-78"/>
+                <a:ea typeface="Amiri" pitchFamily="2" charset="-78"/>
                 <a:cs typeface="Amiri" pitchFamily="2" charset="-78"/>
               </a:rPr>
               <a:t>كَيْفَ سَافَرْتُمْ؟</a:t>
@@ -16151,6 +16281,7 @@
                   <a:srgbClr val="1B3B6F"/>
                 </a:solidFill>
                 <a:latin typeface="Amiri" pitchFamily="2" charset="-78"/>
+                <a:ea typeface="Amiri" pitchFamily="2" charset="-78"/>
                 <a:cs typeface="Amiri" pitchFamily="2" charset="-78"/>
               </a:rPr>
               <a:t>نَزَلْنَا فِي …</a:t>
@@ -16227,6 +16358,7 @@
                   <a:srgbClr val="1B3B6F"/>
                 </a:solidFill>
                 <a:latin typeface="Amiri" pitchFamily="2" charset="-78"/>
+                <a:ea typeface="Amiri" pitchFamily="2" charset="-78"/>
                 <a:cs typeface="Amiri" pitchFamily="2" charset="-78"/>
               </a:rPr>
               <a:t>أَيْنَ نَزَلْتُمْ؟</a:t>
@@ -16395,6 +16527,7 @@
                   <a:srgbClr val="1B3B6F"/>
                 </a:solidFill>
                 <a:latin typeface="Amiri" pitchFamily="2" charset="-78"/>
+                <a:ea typeface="Amiri" pitchFamily="2" charset="-78"/>
                 <a:cs typeface="Amiri" pitchFamily="2" charset="-78"/>
               </a:rPr>
               <a:t>زُرْنَا …</a:t>
@@ -16471,6 +16604,7 @@
                   <a:srgbClr val="1B3B6F"/>
                 </a:solidFill>
                 <a:latin typeface="Amiri" pitchFamily="2" charset="-78"/>
+                <a:ea typeface="Amiri" pitchFamily="2" charset="-78"/>
                 <a:cs typeface="Amiri" pitchFamily="2" charset="-78"/>
               </a:rPr>
               <a:t>مَاذَا زُرْتُمْ؟</a:t>
@@ -16639,6 +16773,7 @@
                   <a:srgbClr val="1B3B6F"/>
                 </a:solidFill>
                 <a:latin typeface="Amiri" pitchFamily="2" charset="-78"/>
+                <a:ea typeface="Amiri" pitchFamily="2" charset="-78"/>
                 <a:cs typeface="Amiri" pitchFamily="2" charset="-78"/>
               </a:rPr>
               <a:t>نَعَمْ، أُحِبُّ السَّفَرَ لِأَنَّ …</a:t>
@@ -16715,6 +16850,7 @@
                   <a:srgbClr val="1B3B6F"/>
                 </a:solidFill>
                 <a:latin typeface="Amiri" pitchFamily="2" charset="-78"/>
+                <a:ea typeface="Amiri" pitchFamily="2" charset="-78"/>
                 <a:cs typeface="Amiri" pitchFamily="2" charset="-78"/>
               </a:rPr>
               <a:t>هَلْ تُحِبُّ السَّفَرَ؟</a:t>
@@ -16869,6 +17005,7 @@
                   <a:srgbClr val="1B3B6F"/>
                 </a:solidFill>
                 <a:latin typeface="Amiri" pitchFamily="2" charset="-78"/>
+                <a:ea typeface="Amiri" pitchFamily="2" charset="-78"/>
                 <a:cs typeface="Amiri" pitchFamily="2" charset="-78"/>
               </a:rPr>
               <a:t>عَفْوًا، هَلْ يُمْكِنُ أَنْ تُعِيدَ السُّؤَالَ؟</a:t>
@@ -17002,6 +17139,7 @@
                   <a:srgbClr val="D4AF37"/>
                 </a:solidFill>
                 <a:latin typeface="Amiri" pitchFamily="2" charset="-78"/>
+                <a:ea typeface="Amiri" pitchFamily="2" charset="-78"/>
                 <a:cs typeface="Amiri" pitchFamily="2" charset="-78"/>
               </a:rPr>
               <a:t>م</a:t>
@@ -17322,6 +17460,7 @@
                   <a:srgbClr val="8A6D1E"/>
                 </a:solidFill>
                 <a:latin typeface="Amiri" pitchFamily="2" charset="-78"/>
+                <a:ea typeface="Amiri" pitchFamily="2" charset="-78"/>
                 <a:cs typeface="Amiri" pitchFamily="2" charset="-78"/>
               </a:rPr>
               <a:t>السَّفَرُ وَالسِّيَاحَةُ</a:t>
@@ -17602,6 +17741,7 @@
                   <a:srgbClr val="1B3B6F"/>
                 </a:solidFill>
                 <a:latin typeface="Amiri" pitchFamily="2" charset="-78"/>
+                <a:ea typeface="Amiri" pitchFamily="2" charset="-78"/>
                 <a:cs typeface="Amiri" pitchFamily="2" charset="-78"/>
               </a:rPr>
               <a:t>أَجْمَلُ مَدِينَةٍ زُرْتُهَا هِيَ … فِيهَا …</a:t>
@@ -17678,6 +17818,7 @@
                   <a:srgbClr val="1B3B6F"/>
                 </a:solidFill>
                 <a:latin typeface="Amiri" pitchFamily="2" charset="-78"/>
+                <a:ea typeface="Amiri" pitchFamily="2" charset="-78"/>
                 <a:cs typeface="Amiri" pitchFamily="2" charset="-78"/>
               </a:rPr>
               <a:t>صِفْ أَجْمَلَ مَدِينَةٍ زُرْتَهَا.</a:t>
@@ -17781,6 +17922,7 @@
                   <a:srgbClr val="1B3B6F"/>
                 </a:solidFill>
                 <a:latin typeface="Amiri" pitchFamily="2" charset="-78"/>
+                <a:ea typeface="Amiri" pitchFamily="2" charset="-78"/>
                 <a:cs typeface="Amiri" pitchFamily="2" charset="-78"/>
               </a:rPr>
               <a:t>أُفَضِّلُ … لِأَنَّ …</a:t>
@@ -17857,6 +17999,7 @@
                   <a:srgbClr val="1B3B6F"/>
                 </a:solidFill>
                 <a:latin typeface="Amiri" pitchFamily="2" charset="-78"/>
+                <a:ea typeface="Amiri" pitchFamily="2" charset="-78"/>
                 <a:cs typeface="Amiri" pitchFamily="2" charset="-78"/>
               </a:rPr>
               <a:t>هَلْ تُفَضِّلُ عُطْلَةً عَلَى الشَّاطِئِ أَمْ فِي مَدِينَةٍ تَارِيخِيَّةٍ؟</a:t>
@@ -17960,6 +18103,7 @@
                   <a:srgbClr val="1B3B6F"/>
                 </a:solidFill>
                 <a:latin typeface="Amiri" pitchFamily="2" charset="-78"/>
+                <a:ea typeface="Amiri" pitchFamily="2" charset="-78"/>
                 <a:cs typeface="Amiri" pitchFamily="2" charset="-78"/>
               </a:rPr>
               <a:t>آخُذُ … لِأَنَّ …</a:t>
@@ -18036,6 +18180,7 @@
                   <a:srgbClr val="1B3B6F"/>
                 </a:solidFill>
                 <a:latin typeface="Amiri" pitchFamily="2" charset="-78"/>
+                <a:ea typeface="Amiri" pitchFamily="2" charset="-78"/>
                 <a:cs typeface="Amiri" pitchFamily="2" charset="-78"/>
               </a:rPr>
               <a:t>مَا الَّذِي تَأْخُذُهُ مَعَكَ دَائِمًا فِي السَّفَرِ؟</a:t>
@@ -18139,6 +18284,7 @@
                   <a:srgbClr val="1B3B6F"/>
                 </a:solidFill>
                 <a:latin typeface="Amiri" pitchFamily="2" charset="-78"/>
+                <a:ea typeface="Amiri" pitchFamily="2" charset="-78"/>
                 <a:cs typeface="Amiri" pitchFamily="2" charset="-78"/>
               </a:rPr>
               <a:t>نَعَمْ، مَرَّةً تَأَخَّرَتْ … فَنِمْنَا …</a:t>
@@ -18215,6 +18361,7 @@
                   <a:srgbClr val="1B3B6F"/>
                 </a:solidFill>
                 <a:latin typeface="Amiri" pitchFamily="2" charset="-78"/>
+                <a:ea typeface="Amiri" pitchFamily="2" charset="-78"/>
                 <a:cs typeface="Amiri" pitchFamily="2" charset="-78"/>
               </a:rPr>
               <a:t>هَلْ حَدَثَتْ لَكَ مُشْكِلَةٌ فِي السَّفَرِ؟</a:t>
@@ -18318,6 +18465,7 @@
                   <a:srgbClr val="1B3B6F"/>
                 </a:solidFill>
                 <a:latin typeface="Amiri" pitchFamily="2" charset="-78"/>
+                <a:ea typeface="Amiri" pitchFamily="2" charset="-78"/>
                 <a:cs typeface="Amiri" pitchFamily="2" charset="-78"/>
               </a:rPr>
               <a:t>إِذَا … سَنَذْهَبُ إِلَى …</a:t>
@@ -18394,6 +18542,7 @@
                   <a:srgbClr val="1B3B6F"/>
                 </a:solidFill>
                 <a:latin typeface="Amiri" pitchFamily="2" charset="-78"/>
+                <a:ea typeface="Amiri" pitchFamily="2" charset="-78"/>
                 <a:cs typeface="Amiri" pitchFamily="2" charset="-78"/>
               </a:rPr>
               <a:t>أَيْنَ سَتَقْضِي عُطْلَتَكَ القَادِمَةَ؟</a:t>
@@ -18603,6 +18752,7 @@
                   <a:srgbClr val="D4AF37"/>
                 </a:solidFill>
                 <a:latin typeface="Amiri" pitchFamily="2" charset="-78"/>
+                <a:ea typeface="Amiri" pitchFamily="2" charset="-78"/>
                 <a:cs typeface="Amiri" pitchFamily="2" charset="-78"/>
               </a:rPr>
               <a:t>م</a:t>
@@ -18923,6 +19073,7 @@
                   <a:srgbClr val="8A6D1E"/>
                 </a:solidFill>
                 <a:latin typeface="Amiri" pitchFamily="2" charset="-78"/>
+                <a:ea typeface="Amiri" pitchFamily="2" charset="-78"/>
                 <a:cs typeface="Amiri" pitchFamily="2" charset="-78"/>
               </a:rPr>
               <a:t>السِّيَاحَةُ وَالعَالَمُ</a:t>
@@ -19203,6 +19354,7 @@
                   <a:srgbClr val="1B3B6F"/>
                 </a:solidFill>
                 <a:latin typeface="Amiri" pitchFamily="2" charset="-78"/>
+                <a:ea typeface="Amiri" pitchFamily="2" charset="-78"/>
                 <a:cs typeface="Amiri" pitchFamily="2" charset="-78"/>
               </a:rPr>
               <a:t>أَعْتَقِدُ أَنَّ … لِأَنَّ …</a:t>
@@ -19279,6 +19431,7 @@
                   <a:srgbClr val="1B3B6F"/>
                 </a:solidFill>
                 <a:latin typeface="Amiri" pitchFamily="2" charset="-78"/>
+                <a:ea typeface="Amiri" pitchFamily="2" charset="-78"/>
                 <a:cs typeface="Amiri" pitchFamily="2" charset="-78"/>
               </a:rPr>
               <a:t>هَلِ السَّفَرُ أَفْضَلُ طَرِيقَةٍ لِلتَّعَلُّمِ؟</a:t>
@@ -19382,6 +19535,7 @@
                   <a:srgbClr val="1B3B6F"/>
                 </a:solidFill>
                 <a:latin typeface="Amiri" pitchFamily="2" charset="-78"/>
+                <a:ea typeface="Amiri" pitchFamily="2" charset="-78"/>
                 <a:cs typeface="Amiri" pitchFamily="2" charset="-78"/>
               </a:rPr>
               <a:t>مِنْ نَاحِيَةٍ … وَمِنْ نَاحِيَةٍ أُخْرَى …</a:t>
@@ -19458,6 +19612,7 @@
                   <a:srgbClr val="1B3B6F"/>
                 </a:solidFill>
                 <a:latin typeface="Amiri" pitchFamily="2" charset="-78"/>
+                <a:ea typeface="Amiri" pitchFamily="2" charset="-78"/>
                 <a:cs typeface="Amiri" pitchFamily="2" charset="-78"/>
               </a:rPr>
               <a:t>كَيْفَ تُؤَثِّرُ السِّيَاحَةُ فِي البِلَادِ الفَقِيرَةِ؟</a:t>
@@ -19561,6 +19716,7 @@
                   <a:srgbClr val="1B3B6F"/>
                 </a:solidFill>
                 <a:latin typeface="Amiri" pitchFamily="2" charset="-78"/>
+                <a:ea typeface="Amiri" pitchFamily="2" charset="-78"/>
                 <a:cs typeface="Amiri" pitchFamily="2" charset="-78"/>
               </a:rPr>
               <a:t>لَيْسَ دَائِمًا؛ فَبَعْضُهُمْ …</a:t>
@@ -19637,6 +19793,7 @@
                   <a:srgbClr val="1B3B6F"/>
                 </a:solidFill>
                 <a:latin typeface="Amiri" pitchFamily="2" charset="-78"/>
+                <a:ea typeface="Amiri" pitchFamily="2" charset="-78"/>
                 <a:cs typeface="Amiri" pitchFamily="2" charset="-78"/>
               </a:rPr>
               <a:t>هَلِ السُّيَّاحُ يَحْتَرِمُونَ ثَقَافَةَ البِلَادِ دَائِمًا؟</a:t>
@@ -19740,6 +19897,7 @@
                   <a:srgbClr val="1B3B6F"/>
                 </a:solidFill>
                 <a:latin typeface="Amiri" pitchFamily="2" charset="-78"/>
+                <a:ea typeface="Amiri" pitchFamily="2" charset="-78"/>
                 <a:cs typeface="Amiri" pitchFamily="2" charset="-78"/>
               </a:rPr>
               <a:t>صَحِيحٌ أَنَّهُ … غَيْرَ أَنَّ …</a:t>
@@ -19816,6 +19974,7 @@
                   <a:srgbClr val="1B3B6F"/>
                 </a:solidFill>
                 <a:latin typeface="Amiri" pitchFamily="2" charset="-78"/>
+                <a:ea typeface="Amiri" pitchFamily="2" charset="-78"/>
                 <a:cs typeface="Amiri" pitchFamily="2" charset="-78"/>
               </a:rPr>
               <a:t>هَلِ السَّفَرُ الافْتِرَاضِيُّ يُغْنِي عَنِ السَّفَرِ الحَقِيقِيِّ؟</a:t>
@@ -19919,6 +20078,7 @@
                   <a:srgbClr val="1B3B6F"/>
                 </a:solidFill>
                 <a:latin typeface="Amiri" pitchFamily="2" charset="-78"/>
+                <a:ea typeface="Amiri" pitchFamily="2" charset="-78"/>
                 <a:cs typeface="Amiri" pitchFamily="2" charset="-78"/>
               </a:rPr>
               <a:t>لَوْ عِشْتُ …، لَاخْتَرْتُ … لِأَنَّ …</a:t>
@@ -19995,6 +20155,7 @@
                   <a:srgbClr val="1B3B6F"/>
                 </a:solidFill>
                 <a:latin typeface="Amiri" pitchFamily="2" charset="-78"/>
+                <a:ea typeface="Amiri" pitchFamily="2" charset="-78"/>
                 <a:cs typeface="Amiri" pitchFamily="2" charset="-78"/>
               </a:rPr>
               <a:t>لَوْ عِشْتَ سَنَةً فِي بَلَدٍ آخَرَ، أَيَّ بَلَدٍ تَخْتَارُ؟</a:t>
@@ -20204,6 +20365,7 @@
                   <a:srgbClr val="D4AF37"/>
                 </a:solidFill>
                 <a:latin typeface="Amiri" pitchFamily="2" charset="-78"/>
+                <a:ea typeface="Amiri" pitchFamily="2" charset="-78"/>
                 <a:cs typeface="Amiri" pitchFamily="2" charset="-78"/>
               </a:rPr>
               <a:t>م</a:t>
@@ -20524,6 +20686,7 @@
                   <a:srgbClr val="8A6D1E"/>
                 </a:solidFill>
                 <a:latin typeface="Amiri" pitchFamily="2" charset="-78"/>
+                <a:ea typeface="Amiri" pitchFamily="2" charset="-78"/>
                 <a:cs typeface="Amiri" pitchFamily="2" charset="-78"/>
               </a:rPr>
               <a:t>آدَابُ الصَّفِّ</a:t>
@@ -22055,6 +22218,7 @@
                   <a:srgbClr val="D4AF37"/>
                 </a:solidFill>
                 <a:latin typeface="Amiri" pitchFamily="2" charset="-78"/>
+                <a:ea typeface="Amiri" pitchFamily="2" charset="-78"/>
                 <a:cs typeface="Amiri" pitchFamily="2" charset="-78"/>
               </a:rPr>
               <a:t>م</a:t>
@@ -22375,6 +22539,7 @@
                   <a:srgbClr val="8A6D1E"/>
                 </a:solidFill>
                 <a:latin typeface="Amiri" pitchFamily="2" charset="-78"/>
+                <a:ea typeface="Amiri" pitchFamily="2" charset="-78"/>
                 <a:cs typeface="Amiri" pitchFamily="2" charset="-78"/>
               </a:rPr>
               <a:t>نَمُوذَجُ الإِجَابَةِ</a:t>
@@ -22617,6 +22782,7 @@
                   <a:srgbClr val="1B3B6F"/>
                 </a:solidFill>
                 <a:latin typeface="Amiri" pitchFamily="2" charset="-78"/>
+                <a:ea typeface="Amiri" pitchFamily="2" charset="-78"/>
                 <a:cs typeface="Amiri" pitchFamily="2" charset="-78"/>
               </a:rPr>
               <a:t>سَافَرْتُ إِلَى مِصْرَ مَعَ أُسْرَتِي.</a:t>
@@ -22693,6 +22859,7 @@
                   <a:srgbClr val="1B3B6F"/>
                 </a:solidFill>
                 <a:latin typeface="Amiri" pitchFamily="2" charset="-78"/>
+                <a:ea typeface="Amiri" pitchFamily="2" charset="-78"/>
                 <a:cs typeface="Amiri" pitchFamily="2" charset="-78"/>
               </a:rPr>
               <a:t>أَيْنَ سَافَرْتَ فِي الصَّيْفِ المَاضِي؟</a:t>
@@ -22796,6 +22963,7 @@
                   <a:srgbClr val="1B3B6F"/>
                 </a:solidFill>
                 <a:latin typeface="Amiri" pitchFamily="2" charset="-78"/>
+                <a:ea typeface="Amiri" pitchFamily="2" charset="-78"/>
                 <a:cs typeface="Amiri" pitchFamily="2" charset="-78"/>
               </a:rPr>
               <a:t>سَافَرْنَا بِالطَّائِرَةِ، وَاسْتَغْرَقَتِ الرِّحْلَةُ خَمْسَ سَاعَاتٍ.</a:t>
@@ -22872,6 +23040,7 @@
                   <a:srgbClr val="1B3B6F"/>
                 </a:solidFill>
                 <a:latin typeface="Amiri" pitchFamily="2" charset="-78"/>
+                <a:ea typeface="Amiri" pitchFamily="2" charset="-78"/>
                 <a:cs typeface="Amiri" pitchFamily="2" charset="-78"/>
               </a:rPr>
               <a:t>كَيْفَ سَافَرْتُمْ؟</a:t>
@@ -22975,6 +23144,7 @@
                   <a:srgbClr val="1B3B6F"/>
                 </a:solidFill>
                 <a:latin typeface="Amiri" pitchFamily="2" charset="-78"/>
+                <a:ea typeface="Amiri" pitchFamily="2" charset="-78"/>
                 <a:cs typeface="Amiri" pitchFamily="2" charset="-78"/>
               </a:rPr>
               <a:t>نَزَلْنَا فِي فُنْدُقٍ كَبِيرٍ قَرِيبٍ مِنَ النِّيلِ.</a:t>
@@ -23051,6 +23221,7 @@
                   <a:srgbClr val="1B3B6F"/>
                 </a:solidFill>
                 <a:latin typeface="Amiri" pitchFamily="2" charset="-78"/>
+                <a:ea typeface="Amiri" pitchFamily="2" charset="-78"/>
                 <a:cs typeface="Amiri" pitchFamily="2" charset="-78"/>
               </a:rPr>
               <a:t>أَيْنَ نَزَلْتُمْ؟</a:t>
@@ -23154,6 +23325,7 @@
                   <a:srgbClr val="1B3B6F"/>
                 </a:solidFill>
                 <a:latin typeface="Amiri" pitchFamily="2" charset="-78"/>
+                <a:ea typeface="Amiri" pitchFamily="2" charset="-78"/>
                 <a:cs typeface="Amiri" pitchFamily="2" charset="-78"/>
               </a:rPr>
               <a:t>زُرْنَا الأَهْرَامَ وَالمُتْحَفَ المِصْرِيَّ.</a:t>
@@ -23230,6 +23402,7 @@
                   <a:srgbClr val="1B3B6F"/>
                 </a:solidFill>
                 <a:latin typeface="Amiri" pitchFamily="2" charset="-78"/>
+                <a:ea typeface="Amiri" pitchFamily="2" charset="-78"/>
                 <a:cs typeface="Amiri" pitchFamily="2" charset="-78"/>
               </a:rPr>
               <a:t>مَاذَا زُرْتُمْ؟</a:t>
@@ -23333,6 +23506,7 @@
                   <a:srgbClr val="1B3B6F"/>
                 </a:solidFill>
                 <a:latin typeface="Amiri" pitchFamily="2" charset="-78"/>
+                <a:ea typeface="Amiri" pitchFamily="2" charset="-78"/>
                 <a:cs typeface="Amiri" pitchFamily="2" charset="-78"/>
               </a:rPr>
               <a:t>نَعَمْ، أُحِبُّ السَّفَرَ كَثِيرًا، لِأَنِّي أَرَى أَمَاكِنَ جَدِيدَةً.</a:t>
@@ -23409,6 +23583,7 @@
                   <a:srgbClr val="1B3B6F"/>
                 </a:solidFill>
                 <a:latin typeface="Amiri" pitchFamily="2" charset="-78"/>
+                <a:ea typeface="Amiri" pitchFamily="2" charset="-78"/>
                 <a:cs typeface="Amiri" pitchFamily="2" charset="-78"/>
               </a:rPr>
               <a:t>هَلْ تُحِبُّ السَّفَرَ؟</a:t>
@@ -23618,6 +23793,7 @@
                   <a:srgbClr val="D4AF37"/>
                 </a:solidFill>
                 <a:latin typeface="Amiri" pitchFamily="2" charset="-78"/>
+                <a:ea typeface="Amiri" pitchFamily="2" charset="-78"/>
                 <a:cs typeface="Amiri" pitchFamily="2" charset="-78"/>
               </a:rPr>
               <a:t>م</a:t>
@@ -23938,6 +24114,7 @@
                   <a:srgbClr val="8A6D1E"/>
                 </a:solidFill>
                 <a:latin typeface="Amiri" pitchFamily="2" charset="-78"/>
+                <a:ea typeface="Amiri" pitchFamily="2" charset="-78"/>
                 <a:cs typeface="Amiri" pitchFamily="2" charset="-78"/>
               </a:rPr>
               <a:t>نَمُوذَجُ الإِجَابَةِ</a:t>
@@ -24180,6 +24357,7 @@
                   <a:srgbClr val="1B3B6F"/>
                 </a:solidFill>
                 <a:latin typeface="Amiri" pitchFamily="2" charset="-78"/>
+                <a:ea typeface="Amiri" pitchFamily="2" charset="-78"/>
                 <a:cs typeface="Amiri" pitchFamily="2" charset="-78"/>
               </a:rPr>
               <a:t>أَجْمَلُ مَدِينَةٍ زُرْتُهَا هِيَ غَرْنَاطَةُ؛ فِيهَا قَصْرُ الحَمْرَاءِ وَحَدَائِقُ رَائِعَةٌ وَشَوَارِعُ ضَيِّقَةٌ.</a:t>
@@ -24256,6 +24434,7 @@
                   <a:srgbClr val="1B3B6F"/>
                 </a:solidFill>
                 <a:latin typeface="Amiri" pitchFamily="2" charset="-78"/>
+                <a:ea typeface="Amiri" pitchFamily="2" charset="-78"/>
                 <a:cs typeface="Amiri" pitchFamily="2" charset="-78"/>
               </a:rPr>
               <a:t>صِفْ أَجْمَلَ مَدِينَةٍ زُرْتَهَا.</a:t>
@@ -24359,6 +24538,7 @@
                   <a:srgbClr val="1B3B6F"/>
                 </a:solidFill>
                 <a:latin typeface="Amiri" pitchFamily="2" charset="-78"/>
+                <a:ea typeface="Amiri" pitchFamily="2" charset="-78"/>
                 <a:cs typeface="Amiri" pitchFamily="2" charset="-78"/>
               </a:rPr>
               <a:t>أُفَضِّلُ المَدِينَةَ التَّارِيخِيَّةَ، لِأَنِّي أُحِبُّ التَّارِيخَ، وَالشَّاطِئُ مُمِلٌّ بَعْدَ يَوْمَيْنِ.</a:t>
@@ -24438,6 +24618,7 @@
                   <a:srgbClr val="1B3B6F"/>
                 </a:solidFill>
                 <a:latin typeface="Amiri" pitchFamily="2" charset="-78"/>
+                <a:ea typeface="Amiri" pitchFamily="2" charset="-78"/>
                 <a:cs typeface="Amiri" pitchFamily="2" charset="-78"/>
               </a:rPr>
               <a:t>هَلْ تُفَضِّلُ عُطْلَةً عَلَى الشَّاطِئِ أَمْ فِي مَدِينَةٍ تَارِيخِيَّةٍ؟</a:t>
@@ -24541,6 +24722,7 @@
                   <a:srgbClr val="1B3B6F"/>
                 </a:solidFill>
                 <a:latin typeface="Amiri" pitchFamily="2" charset="-78"/>
+                <a:ea typeface="Amiri" pitchFamily="2" charset="-78"/>
                 <a:cs typeface="Amiri" pitchFamily="2" charset="-78"/>
               </a:rPr>
               <a:t>آخُذُ دَائِمًا كِتَابًا وَشَاحِنَ الهَاتِفِ، لِأَنَّ الرِّحْلَاتِ الطَّوِيلَةَ مُمِلَّةٌ.</a:t>
@@ -24617,6 +24799,7 @@
                   <a:srgbClr val="1B3B6F"/>
                 </a:solidFill>
                 <a:latin typeface="Amiri" pitchFamily="2" charset="-78"/>
+                <a:ea typeface="Amiri" pitchFamily="2" charset="-78"/>
                 <a:cs typeface="Amiri" pitchFamily="2" charset="-78"/>
               </a:rPr>
               <a:t>مَا الَّذِي تَأْخُذُهُ مَعَكَ دَائِمًا فِي السَّفَرِ؟</a:t>
@@ -24720,6 +24903,7 @@
                   <a:srgbClr val="1B3B6F"/>
                 </a:solidFill>
                 <a:latin typeface="Amiri" pitchFamily="2" charset="-78"/>
+                <a:ea typeface="Amiri" pitchFamily="2" charset="-78"/>
                 <a:cs typeface="Amiri" pitchFamily="2" charset="-78"/>
               </a:rPr>
               <a:t>نَعَمْ، مَرَّةً تَأَخَّرَتْ طَائِرَتُنَا سِتَّ سَاعَاتٍ، فَنِمْنَا عَلَى الكَرَاسِي فِي المَطَارِ.</a:t>
@@ -24796,6 +24980,7 @@
                   <a:srgbClr val="1B3B6F"/>
                 </a:solidFill>
                 <a:latin typeface="Amiri" pitchFamily="2" charset="-78"/>
+                <a:ea typeface="Amiri" pitchFamily="2" charset="-78"/>
                 <a:cs typeface="Amiri" pitchFamily="2" charset="-78"/>
               </a:rPr>
               <a:t>هَلْ حَدَثَتْ لَكَ مُشْكِلَةٌ فِي السَّفَرِ؟</a:t>
@@ -24899,6 +25084,7 @@
                   <a:srgbClr val="1B3B6F"/>
                 </a:solidFill>
                 <a:latin typeface="Amiri" pitchFamily="2" charset="-78"/>
+                <a:ea typeface="Amiri" pitchFamily="2" charset="-78"/>
                 <a:cs typeface="Amiri" pitchFamily="2" charset="-78"/>
               </a:rPr>
               <a:t>إِذَا نَجَحْتُ فِي الامْتِحَانَاتِ، سَنَذْهَبُ إِلَى الأُرْدُنِّ لِنَزُورَ البَتْرَاءَ.</a:t>
@@ -24975,6 +25161,7 @@
                   <a:srgbClr val="1B3B6F"/>
                 </a:solidFill>
                 <a:latin typeface="Amiri" pitchFamily="2" charset="-78"/>
+                <a:ea typeface="Amiri" pitchFamily="2" charset="-78"/>
                 <a:cs typeface="Amiri" pitchFamily="2" charset="-78"/>
               </a:rPr>
               <a:t>أَيْنَ سَتَقْضِي عُطْلَتَكَ القَادِمَةَ؟</a:t>
@@ -25184,6 +25371,7 @@
                   <a:srgbClr val="D4AF37"/>
                 </a:solidFill>
                 <a:latin typeface="Amiri" pitchFamily="2" charset="-78"/>
+                <a:ea typeface="Amiri" pitchFamily="2" charset="-78"/>
                 <a:cs typeface="Amiri" pitchFamily="2" charset="-78"/>
               </a:rPr>
               <a:t>م</a:t>
@@ -25504,6 +25692,7 @@
                   <a:srgbClr val="8A6D1E"/>
                 </a:solidFill>
                 <a:latin typeface="Amiri" pitchFamily="2" charset="-78"/>
+                <a:ea typeface="Amiri" pitchFamily="2" charset="-78"/>
                 <a:cs typeface="Amiri" pitchFamily="2" charset="-78"/>
               </a:rPr>
               <a:t>نَمُوذَجُ الإِجَابَةِ</a:t>
@@ -25746,6 +25935,7 @@
                   <a:srgbClr val="1B3B6F"/>
                 </a:solidFill>
                 <a:latin typeface="Amiri" pitchFamily="2" charset="-78"/>
+                <a:ea typeface="Amiri" pitchFamily="2" charset="-78"/>
                 <a:cs typeface="Amiri" pitchFamily="2" charset="-78"/>
               </a:rPr>
               <a:t>أَعْتَقِدُ أَنَّهُ مِنْ أَفْضَلِ الطُّرُقِ، لِأَنَّنَا نَتَعَلَّمُ اللُّغَةَ وَالتَّارِيخَ مِنَ النَّاسِ مُبَاشَرَةً، لَا مِنَ الكُتُبِ فَقَطْ.</a:t>
@@ -25822,6 +26012,7 @@
                   <a:srgbClr val="1B3B6F"/>
                 </a:solidFill>
                 <a:latin typeface="Amiri" pitchFamily="2" charset="-78"/>
+                <a:ea typeface="Amiri" pitchFamily="2" charset="-78"/>
                 <a:cs typeface="Amiri" pitchFamily="2" charset="-78"/>
               </a:rPr>
               <a:t>هَلِ السَّفَرُ أَفْضَلُ طَرِيقَةٍ لِلتَّعَلُّمِ؟</a:t>
@@ -25925,6 +26116,7 @@
                   <a:srgbClr val="1B3B6F"/>
                 </a:solidFill>
                 <a:latin typeface="Amiri" pitchFamily="2" charset="-78"/>
+                <a:ea typeface="Amiri" pitchFamily="2" charset="-78"/>
                 <a:cs typeface="Amiri" pitchFamily="2" charset="-78"/>
               </a:rPr>
               <a:t>مِنْ نَاحِيَةٍ تُوَفِّرُ فُرَصَ عَمَلٍ، وَمِنْ نَاحِيَةٍ أُخْرَى قَدْ تُضِرُّ بِالبِيئَةِ وَالتَّقَالِيدِ المَحَلِّيَّةِ.</a:t>
@@ -26001,6 +26193,7 @@
                   <a:srgbClr val="1B3B6F"/>
                 </a:solidFill>
                 <a:latin typeface="Amiri" pitchFamily="2" charset="-78"/>
+                <a:ea typeface="Amiri" pitchFamily="2" charset="-78"/>
                 <a:cs typeface="Amiri" pitchFamily="2" charset="-78"/>
               </a:rPr>
               <a:t>كَيْفَ تُؤَثِّرُ السِّيَاحَةُ فِي البِلَادِ الفَقِيرَةِ؟</a:t>
@@ -26104,6 +26297,7 @@
                   <a:srgbClr val="1B3B6F"/>
                 </a:solidFill>
                 <a:latin typeface="Amiri" pitchFamily="2" charset="-78"/>
+                <a:ea typeface="Amiri" pitchFamily="2" charset="-78"/>
                 <a:cs typeface="Amiri" pitchFamily="2" charset="-78"/>
               </a:rPr>
               <a:t>لَيْسَ دَائِمًا؛ فَبَعْضُهُمْ يَلْبَسُونَ مَلَابِسَ غَيْرَ مُنَاسِبَةٍ فِي الأَمَاكِنِ الدِّينِيَّةِ، لِأَنَّهُمْ لَمْ يَقْرَؤُوا عَنْهَا قَبْلَ السَّفَرِ.</a:t>
@@ -26180,6 +26374,7 @@
                   <a:srgbClr val="1B3B6F"/>
                 </a:solidFill>
                 <a:latin typeface="Amiri" pitchFamily="2" charset="-78"/>
+                <a:ea typeface="Amiri" pitchFamily="2" charset="-78"/>
                 <a:cs typeface="Amiri" pitchFamily="2" charset="-78"/>
               </a:rPr>
               <a:t>هَلِ السُّيَّاحُ يَحْتَرِمُونَ ثَقَافَةَ البِلَادِ دَائِمًا؟</a:t>
@@ -26389,6 +26584,7 @@
                   <a:srgbClr val="D4AF37"/>
                 </a:solidFill>
                 <a:latin typeface="Amiri" pitchFamily="2" charset="-78"/>
+                <a:ea typeface="Amiri" pitchFamily="2" charset="-78"/>
                 <a:cs typeface="Amiri" pitchFamily="2" charset="-78"/>
               </a:rPr>
               <a:t>م</a:t>
@@ -26709,6 +26905,7 @@
                   <a:srgbClr val="8A6D1E"/>
                 </a:solidFill>
                 <a:latin typeface="Amiri" pitchFamily="2" charset="-78"/>
+                <a:ea typeface="Amiri" pitchFamily="2" charset="-78"/>
                 <a:cs typeface="Amiri" pitchFamily="2" charset="-78"/>
               </a:rPr>
               <a:t>نَمُوذَجُ الإِجَابَةِ</a:t>
@@ -26951,6 +27148,7 @@
                   <a:srgbClr val="1B3B6F"/>
                 </a:solidFill>
                 <a:latin typeface="Amiri" pitchFamily="2" charset="-78"/>
+                <a:ea typeface="Amiri" pitchFamily="2" charset="-78"/>
                 <a:cs typeface="Amiri" pitchFamily="2" charset="-78"/>
               </a:rPr>
               <a:t>صَحِيحٌ أَنَّهُ رَخِيصٌ وَمُفِيدٌ لِلْبِيئَةِ، غَيْرَ أَنَّهُ لَا يُعْطِينَا رَائِحَةَ الأَسْوَاقِ وَلَا طَعْمَ الأَكْلِ.</a:t>
@@ -27030,6 +27228,7 @@
                   <a:srgbClr val="1B3B6F"/>
                 </a:solidFill>
                 <a:latin typeface="Amiri" pitchFamily="2" charset="-78"/>
+                <a:ea typeface="Amiri" pitchFamily="2" charset="-78"/>
                 <a:cs typeface="Amiri" pitchFamily="2" charset="-78"/>
               </a:rPr>
               <a:t>هَلِ السَّفَرُ الافْتِرَاضِيُّ يُغْنِي عَنِ السَّفَرِ الحَقِيقِيِّ؟</a:t>
@@ -27133,6 +27332,7 @@
                   <a:srgbClr val="1B3B6F"/>
                 </a:solidFill>
                 <a:latin typeface="Amiri" pitchFamily="2" charset="-78"/>
+                <a:ea typeface="Amiri" pitchFamily="2" charset="-78"/>
                 <a:cs typeface="Amiri" pitchFamily="2" charset="-78"/>
               </a:rPr>
               <a:t>لَوْ عِشْتُ سَنَةً فِي بَلَدٍ آخَرَ، لَاخْتَرْتُ اليَابَانَ، لِأَنَّ ثَقَافَتَهَا مُخْتَلِفَةٌ تَمَامًا عَنْ ثَقَافَتِنَا.</a:t>
@@ -27209,6 +27409,7 @@
                   <a:srgbClr val="1B3B6F"/>
                 </a:solidFill>
                 <a:latin typeface="Amiri" pitchFamily="2" charset="-78"/>
+                <a:ea typeface="Amiri" pitchFamily="2" charset="-78"/>
                 <a:cs typeface="Amiri" pitchFamily="2" charset="-78"/>
               </a:rPr>
               <a:t>لَوْ عِشْتَ سَنَةً فِي بَلَدٍ آخَرَ، أَيَّ بَلَدٍ تَخْتَارُ؟</a:t>
@@ -27418,6 +27619,7 @@
                   <a:srgbClr val="D4AF37"/>
                 </a:solidFill>
                 <a:latin typeface="Amiri" pitchFamily="2" charset="-78"/>
+                <a:ea typeface="Amiri" pitchFamily="2" charset="-78"/>
                 <a:cs typeface="Amiri" pitchFamily="2" charset="-78"/>
               </a:rPr>
               <a:t>م</a:t>
@@ -27738,6 +27940,7 @@
                   <a:srgbClr val="8A6D1E"/>
                 </a:solidFill>
                 <a:latin typeface="Amiri" pitchFamily="2" charset="-78"/>
+                <a:ea typeface="Amiri" pitchFamily="2" charset="-78"/>
                 <a:cs typeface="Amiri" pitchFamily="2" charset="-78"/>
               </a:rPr>
               <a:t>قَيِّمْ عَمَلَكَ</a:t>
@@ -28982,6 +29185,7 @@
                   <a:srgbClr val="FFFFFF"/>
                 </a:solidFill>
                 <a:latin typeface="Amiri" pitchFamily="2" charset="-78"/>
+                <a:ea typeface="Amiri" pitchFamily="2" charset="-78"/>
                 <a:cs typeface="Amiri" pitchFamily="2" charset="-78"/>
               </a:rPr>
               <a:t>أَحْسَنْتُمْ! إِلَى اللِّقَاءِ</a:t>
@@ -29134,6 +29338,7 @@
                   <a:srgbClr val="D4AF37"/>
                 </a:solidFill>
                 <a:latin typeface="Amiri" pitchFamily="2" charset="-78"/>
+                <a:ea typeface="Amiri" pitchFamily="2" charset="-78"/>
                 <a:cs typeface="Amiri" pitchFamily="2" charset="-78"/>
               </a:rPr>
               <a:t>وَرْشَةُ الكِتَابَةِ</a:t>
@@ -29267,6 +29472,7 @@
                   <a:srgbClr val="D4AF37"/>
                 </a:solidFill>
                 <a:latin typeface="Amiri" pitchFamily="2" charset="-78"/>
+                <a:ea typeface="Amiri" pitchFamily="2" charset="-78"/>
                 <a:cs typeface="Amiri" pitchFamily="2" charset="-78"/>
               </a:rPr>
               <a:t>م</a:t>
@@ -29587,6 +29793,7 @@
                   <a:srgbClr val="8A6D1E"/>
                 </a:solidFill>
                 <a:latin typeface="Amiri" pitchFamily="2" charset="-78"/>
+                <a:ea typeface="Amiri" pitchFamily="2" charset="-78"/>
                 <a:cs typeface="Amiri" pitchFamily="2" charset="-78"/>
               </a:rPr>
               <a:t>خَرِيطَةُ الوَرْشَةِ</a:t>
@@ -29901,6 +30108,7 @@
                   <a:srgbClr val="1B3B6F"/>
                 </a:solidFill>
                 <a:latin typeface="Amiri" pitchFamily="2" charset="-78"/>
+                <a:ea typeface="Amiri" pitchFamily="2" charset="-78"/>
                 <a:cs typeface="Amiri" pitchFamily="2" charset="-78"/>
               </a:rPr>
               <a:t>كَيْفَ</a:t>
@@ -30177,6 +30385,7 @@
                   <a:srgbClr val="1E6B52"/>
                 </a:solidFill>
                 <a:latin typeface="Amiri" pitchFamily="2" charset="-78"/>
+                <a:ea typeface="Amiri" pitchFamily="2" charset="-78"/>
                 <a:cs typeface="Amiri" pitchFamily="2" charset="-78"/>
               </a:rPr>
               <a:t>تَمْثِيلُ الدَّوْرِ</a:t>
@@ -30453,6 +30662,7 @@
                   <a:srgbClr val="8A6D1E"/>
                 </a:solidFill>
                 <a:latin typeface="Amiri" pitchFamily="2" charset="-78"/>
+                <a:ea typeface="Amiri" pitchFamily="2" charset="-78"/>
                 <a:cs typeface="Amiri" pitchFamily="2" charset="-78"/>
               </a:rPr>
               <a:t>النَّمُوذَجُ</a:t>
@@ -30729,6 +30939,7 @@
                   <a:srgbClr val="1E6B52"/>
                 </a:solidFill>
                 <a:latin typeface="Amiri" pitchFamily="2" charset="-78"/>
+                <a:ea typeface="Amiri" pitchFamily="2" charset="-78"/>
                 <a:cs typeface="Amiri" pitchFamily="2" charset="-78"/>
               </a:rPr>
               <a:t>المُحَادَثَةُ</a:t>
@@ -31005,6 +31216,7 @@
                   <a:srgbClr val="8A6D1E"/>
                 </a:solidFill>
                 <a:latin typeface="Amiri" pitchFamily="2" charset="-78"/>
+                <a:ea typeface="Amiri" pitchFamily="2" charset="-78"/>
                 <a:cs typeface="Amiri" pitchFamily="2" charset="-78"/>
               </a:rPr>
               <a:t>قَيِّمْ</a:t>
@@ -31248,6 +31460,7 @@
                   <a:srgbClr val="D4AF37"/>
                 </a:solidFill>
                 <a:latin typeface="Amiri" pitchFamily="2" charset="-78"/>
+                <a:ea typeface="Amiri" pitchFamily="2" charset="-78"/>
                 <a:cs typeface="Amiri" pitchFamily="2" charset="-78"/>
               </a:rPr>
               <a:t>م</a:t>
@@ -31568,6 +31781,7 @@
                   <a:srgbClr val="8A6D1E"/>
                 </a:solidFill>
                 <a:latin typeface="Amiri" pitchFamily="2" charset="-78"/>
+                <a:ea typeface="Amiri" pitchFamily="2" charset="-78"/>
                 <a:cs typeface="Amiri" pitchFamily="2" charset="-78"/>
               </a:rPr>
               <a:t>امْتِحَانُ التَّحَدُّثِ</a:t>
@@ -32192,6 +32406,7 @@
                   <a:srgbClr val="1B3B6F"/>
                 </a:solidFill>
                 <a:latin typeface="Amiri" pitchFamily="2" charset="-78"/>
+                <a:ea typeface="Amiri" pitchFamily="2" charset="-78"/>
                 <a:cs typeface="Amiri" pitchFamily="2" charset="-78"/>
               </a:rPr>
               <a:t>عَفْوًا، هَلْ يُمْكِنُ أَنْ تُعِيدَ السُّؤَالَ؟</a:t>
@@ -32291,6 +32506,7 @@
                   <a:srgbClr val="1B3B6F"/>
                 </a:solidFill>
                 <a:latin typeface="Amiri" pitchFamily="2" charset="-78"/>
+                <a:ea typeface="Amiri" pitchFamily="2" charset="-78"/>
                 <a:cs typeface="Amiri" pitchFamily="2" charset="-78"/>
               </a:rPr>
               <a:t>لَحْظَةً، دَعْنِي أُفَكِّرُ …</a:t>
@@ -32390,6 +32606,7 @@
                   <a:srgbClr val="1B3B6F"/>
                 </a:solidFill>
                 <a:latin typeface="Amiri" pitchFamily="2" charset="-78"/>
+                <a:ea typeface="Amiri" pitchFamily="2" charset="-78"/>
                 <a:cs typeface="Amiri" pitchFamily="2" charset="-78"/>
               </a:rPr>
               <a:t>أَقْصِدُ …</a:t>
@@ -32561,6 +32778,7 @@
                   <a:srgbClr val="D4AF37"/>
                 </a:solidFill>
                 <a:latin typeface="Amiri" pitchFamily="2" charset="-78"/>
+                <a:ea typeface="Amiri" pitchFamily="2" charset="-78"/>
                 <a:cs typeface="Amiri" pitchFamily="2" charset="-78"/>
               </a:rPr>
               <a:t>م</a:t>
@@ -32881,6 +33099,7 @@
                   <a:srgbClr val="8A6D1E"/>
                 </a:solidFill>
                 <a:latin typeface="Amiri" pitchFamily="2" charset="-78"/>
+                <a:ea typeface="Amiri" pitchFamily="2" charset="-78"/>
                 <a:cs typeface="Amiri" pitchFamily="2" charset="-78"/>
               </a:rPr>
               <a:t>أَيْنَ سَافَرْتَ؟</a:t>
@@ -33184,6 +33403,7 @@
                   <a:srgbClr val="1B3B6F"/>
                 </a:solidFill>
                 <a:latin typeface="Amiri" pitchFamily="2" charset="-78"/>
+                <a:ea typeface="Amiri" pitchFamily="2" charset="-78"/>
                 <a:cs typeface="Amiri" pitchFamily="2" charset="-78"/>
               </a:rPr>
               <a:t>سَافَرْتُ</a:t>
@@ -33341,6 +33561,7 @@
                   <a:srgbClr val="1B3B6F"/>
                 </a:solidFill>
                 <a:latin typeface="Amiri" pitchFamily="2" charset="-78"/>
+                <a:ea typeface="Amiri" pitchFamily="2" charset="-78"/>
                 <a:cs typeface="Amiri" pitchFamily="2" charset="-78"/>
               </a:rPr>
               <a:t>سَافَرْنَا</a:t>
@@ -33444,6 +33665,7 @@
                   <a:srgbClr val="1B3B6F"/>
                 </a:solidFill>
                 <a:latin typeface="Amiri" pitchFamily="2" charset="-78"/>
+                <a:ea typeface="Amiri" pitchFamily="2" charset="-78"/>
                 <a:cs typeface="Amiri" pitchFamily="2" charset="-78"/>
               </a:rPr>
               <a:t>سَافَرَتْ</a:t>
@@ -33547,6 +33769,7 @@
                   <a:srgbClr val="1B3B6F"/>
                 </a:solidFill>
                 <a:latin typeface="Amiri" pitchFamily="2" charset="-78"/>
+                <a:ea typeface="Amiri" pitchFamily="2" charset="-78"/>
                 <a:cs typeface="Amiri" pitchFamily="2" charset="-78"/>
               </a:rPr>
               <a:t>سَافَرَ</a:t>
@@ -33812,6 +34035,7 @@
                   <a:srgbClr val="1B3B6F"/>
                 </a:solidFill>
                 <a:latin typeface="Amiri" pitchFamily="2" charset="-78"/>
+                <a:ea typeface="Amiri" pitchFamily="2" charset="-78"/>
                 <a:cs typeface="Amiri" pitchFamily="2" charset="-78"/>
               </a:rPr>
               <a:t>زُرْتُ</a:t>
@@ -33969,6 +34193,7 @@
                   <a:srgbClr val="1B3B6F"/>
                 </a:solidFill>
                 <a:latin typeface="Amiri" pitchFamily="2" charset="-78"/>
+                <a:ea typeface="Amiri" pitchFamily="2" charset="-78"/>
                 <a:cs typeface="Amiri" pitchFamily="2" charset="-78"/>
               </a:rPr>
               <a:t>زُرْنَا</a:t>
@@ -34072,6 +34297,7 @@
                   <a:srgbClr val="1B3B6F"/>
                 </a:solidFill>
                 <a:latin typeface="Amiri" pitchFamily="2" charset="-78"/>
+                <a:ea typeface="Amiri" pitchFamily="2" charset="-78"/>
                 <a:cs typeface="Amiri" pitchFamily="2" charset="-78"/>
               </a:rPr>
               <a:t>زَارَتْ</a:t>
@@ -34175,6 +34401,7 @@
                   <a:srgbClr val="1B3B6F"/>
                 </a:solidFill>
                 <a:latin typeface="Amiri" pitchFamily="2" charset="-78"/>
+                <a:ea typeface="Amiri" pitchFamily="2" charset="-78"/>
                 <a:cs typeface="Amiri" pitchFamily="2" charset="-78"/>
               </a:rPr>
               <a:t>زَارَ</a:t>
@@ -34440,6 +34667,7 @@
                   <a:srgbClr val="1B3B6F"/>
                 </a:solidFill>
                 <a:latin typeface="Amiri" pitchFamily="2" charset="-78"/>
+                <a:ea typeface="Amiri" pitchFamily="2" charset="-78"/>
                 <a:cs typeface="Amiri" pitchFamily="2" charset="-78"/>
               </a:rPr>
               <a:t>نَزَلْتُ فِي …</a:t>
@@ -34597,6 +34825,7 @@
                   <a:srgbClr val="1B3B6F"/>
                 </a:solidFill>
                 <a:latin typeface="Amiri" pitchFamily="2" charset="-78"/>
+                <a:ea typeface="Amiri" pitchFamily="2" charset="-78"/>
                 <a:cs typeface="Amiri" pitchFamily="2" charset="-78"/>
               </a:rPr>
               <a:t>نَزَلْنَا</a:t>
@@ -34700,6 +34929,7 @@
                   <a:srgbClr val="1B3B6F"/>
                 </a:solidFill>
                 <a:latin typeface="Amiri" pitchFamily="2" charset="-78"/>
+                <a:ea typeface="Amiri" pitchFamily="2" charset="-78"/>
                 <a:cs typeface="Amiri" pitchFamily="2" charset="-78"/>
               </a:rPr>
               <a:t>نَزَلَتْ</a:t>
@@ -34803,6 +35033,7 @@
                   <a:srgbClr val="1B3B6F"/>
                 </a:solidFill>
                 <a:latin typeface="Amiri" pitchFamily="2" charset="-78"/>
+                <a:ea typeface="Amiri" pitchFamily="2" charset="-78"/>
                 <a:cs typeface="Amiri" pitchFamily="2" charset="-78"/>
               </a:rPr>
               <a:t>نَزَلَ</a:t>
@@ -35068,6 +35299,7 @@
                   <a:srgbClr val="1B3B6F"/>
                 </a:solidFill>
                 <a:latin typeface="Amiri" pitchFamily="2" charset="-78"/>
+                <a:ea typeface="Amiri" pitchFamily="2" charset="-78"/>
                 <a:cs typeface="Amiri" pitchFamily="2" charset="-78"/>
               </a:rPr>
               <a:t>أَحْجِزُ</a:t>
@@ -35225,6 +35457,7 @@
                   <a:srgbClr val="1B3B6F"/>
                 </a:solidFill>
                 <a:latin typeface="Amiri" pitchFamily="2" charset="-78"/>
+                <a:ea typeface="Amiri" pitchFamily="2" charset="-78"/>
                 <a:cs typeface="Amiri" pitchFamily="2" charset="-78"/>
               </a:rPr>
               <a:t>نَحْجِزُ</a:t>
@@ -35328,6 +35561,7 @@
                   <a:srgbClr val="1B3B6F"/>
                 </a:solidFill>
                 <a:latin typeface="Amiri" pitchFamily="2" charset="-78"/>
+                <a:ea typeface="Amiri" pitchFamily="2" charset="-78"/>
                 <a:cs typeface="Amiri" pitchFamily="2" charset="-78"/>
               </a:rPr>
               <a:t>يَحْجِزُ</a:t>
@@ -35431,6 +35665,7 @@
                   <a:srgbClr val="1B3B6F"/>
                 </a:solidFill>
                 <a:latin typeface="Amiri" pitchFamily="2" charset="-78"/>
+                <a:ea typeface="Amiri" pitchFamily="2" charset="-78"/>
                 <a:cs typeface="Amiri" pitchFamily="2" charset="-78"/>
               </a:rPr>
               <a:t>حَجَزْتُ</a:t>
@@ -35696,6 +35931,7 @@
                   <a:srgbClr val="1B3B6F"/>
                 </a:solidFill>
                 <a:latin typeface="Amiri" pitchFamily="2" charset="-78"/>
+                <a:ea typeface="Amiri" pitchFamily="2" charset="-78"/>
                 <a:cs typeface="Amiri" pitchFamily="2" charset="-78"/>
               </a:rPr>
               <a:t>سَائِحٌ</a:t>
@@ -35853,6 +36089,7 @@
                   <a:srgbClr val="1B3B6F"/>
                 </a:solidFill>
                 <a:latin typeface="Amiri" pitchFamily="2" charset="-78"/>
+                <a:ea typeface="Amiri" pitchFamily="2" charset="-78"/>
                 <a:cs typeface="Amiri" pitchFamily="2" charset="-78"/>
               </a:rPr>
               <a:t>سُيَّاحٌ</a:t>
@@ -35956,6 +36193,7 @@
                   <a:srgbClr val="1B3B6F"/>
                 </a:solidFill>
                 <a:latin typeface="Amiri" pitchFamily="2" charset="-78"/>
+                <a:ea typeface="Amiri" pitchFamily="2" charset="-78"/>
                 <a:cs typeface="Amiri" pitchFamily="2" charset="-78"/>
               </a:rPr>
               <a:t>سَائِحَةٌ</a:t>
@@ -36059,6 +36297,7 @@
                   <a:srgbClr val="1B3B6F"/>
                 </a:solidFill>
                 <a:latin typeface="Amiri" pitchFamily="2" charset="-78"/>
+                <a:ea typeface="Amiri" pitchFamily="2" charset="-78"/>
                 <a:cs typeface="Amiri" pitchFamily="2" charset="-78"/>
               </a:rPr>
               <a:t>سَائِحٌ</a:t>
@@ -36324,6 +36563,7 @@
                   <a:srgbClr val="1B3B6F"/>
                 </a:solidFill>
                 <a:latin typeface="Amiri" pitchFamily="2" charset="-78"/>
+                <a:ea typeface="Amiri" pitchFamily="2" charset="-78"/>
                 <a:cs typeface="Amiri" pitchFamily="2" charset="-78"/>
               </a:rPr>
               <a:t>فُنْدُقٌ</a:t>
@@ -36481,6 +36721,7 @@
                   <a:srgbClr val="1B3B6F"/>
                 </a:solidFill>
                 <a:latin typeface="Amiri" pitchFamily="2" charset="-78"/>
+                <a:ea typeface="Amiri" pitchFamily="2" charset="-78"/>
                 <a:cs typeface="Amiri" pitchFamily="2" charset="-78"/>
               </a:rPr>
               <a:t>فَنَادِقُ</a:t>
@@ -36584,6 +36825,7 @@
                   <a:srgbClr val="1B3B6F"/>
                 </a:solidFill>
                 <a:latin typeface="Amiri" pitchFamily="2" charset="-78"/>
+                <a:ea typeface="Amiri" pitchFamily="2" charset="-78"/>
                 <a:cs typeface="Amiri" pitchFamily="2" charset="-78"/>
               </a:rPr>
               <a:t>فُنْدُقٌ</a:t>
@@ -36717,6 +36959,7 @@
                   <a:srgbClr val="D4AF37"/>
                 </a:solidFill>
                 <a:latin typeface="Amiri" pitchFamily="2" charset="-78"/>
+                <a:ea typeface="Amiri" pitchFamily="2" charset="-78"/>
                 <a:cs typeface="Amiri" pitchFamily="2" charset="-78"/>
               </a:rPr>
               <a:t>م</a:t>
@@ -37037,6 +37280,7 @@
                   <a:srgbClr val="8A6D1E"/>
                 </a:solidFill>
                 <a:latin typeface="Amiri" pitchFamily="2" charset="-78"/>
+                <a:ea typeface="Amiri" pitchFamily="2" charset="-78"/>
                 <a:cs typeface="Amiri" pitchFamily="2" charset="-78"/>
               </a:rPr>
               <a:t>الفُنْدُقُ وَالمَعَالِمُ</a:t>
@@ -37340,6 +37584,7 @@
                   <a:srgbClr val="1B3B6F"/>
                 </a:solidFill>
                 <a:latin typeface="Amiri" pitchFamily="2" charset="-78"/>
+                <a:ea typeface="Amiri" pitchFamily="2" charset="-78"/>
                 <a:cs typeface="Amiri" pitchFamily="2" charset="-78"/>
               </a:rPr>
               <a:t>غُرْفَةٌ مُزْدَوِجَةٌ</a:t>
@@ -37497,6 +37742,7 @@
                   <a:srgbClr val="1B3B6F"/>
                 </a:solidFill>
                 <a:latin typeface="Amiri" pitchFamily="2" charset="-78"/>
+                <a:ea typeface="Amiri" pitchFamily="2" charset="-78"/>
                 <a:cs typeface="Amiri" pitchFamily="2" charset="-78"/>
               </a:rPr>
               <a:t>غُرَفٌ</a:t>
@@ -37600,6 +37846,7 @@
                   <a:srgbClr val="1B3B6F"/>
                 </a:solidFill>
                 <a:latin typeface="Amiri" pitchFamily="2" charset="-78"/>
+                <a:ea typeface="Amiri" pitchFamily="2" charset="-78"/>
                 <a:cs typeface="Amiri" pitchFamily="2" charset="-78"/>
               </a:rPr>
               <a:t>غُرْفَةٌ مُفْرَدَةٌ</a:t>
@@ -37865,6 +38112,7 @@
                   <a:srgbClr val="1B3B6F"/>
                 </a:solidFill>
                 <a:latin typeface="Amiri" pitchFamily="2" charset="-78"/>
+                <a:ea typeface="Amiri" pitchFamily="2" charset="-78"/>
                 <a:cs typeface="Amiri" pitchFamily="2" charset="-78"/>
               </a:rPr>
               <a:t>مَعْلَمٌ سِيَاحِيٌّ</a:t>
@@ -38022,6 +38270,7 @@
                   <a:srgbClr val="1B3B6F"/>
                 </a:solidFill>
                 <a:latin typeface="Amiri" pitchFamily="2" charset="-78"/>
+                <a:ea typeface="Amiri" pitchFamily="2" charset="-78"/>
                 <a:cs typeface="Amiri" pitchFamily="2" charset="-78"/>
               </a:rPr>
               <a:t>مَعَالِمُ</a:t>
@@ -38125,6 +38374,7 @@
                   <a:srgbClr val="1B3B6F"/>
                 </a:solidFill>
                 <a:latin typeface="Amiri" pitchFamily="2" charset="-78"/>
+                <a:ea typeface="Amiri" pitchFamily="2" charset="-78"/>
                 <a:cs typeface="Amiri" pitchFamily="2" charset="-78"/>
               </a:rPr>
               <a:t>مَعْلَمٌ</a:t>
@@ -38390,6 +38640,7 @@
                   <a:srgbClr val="1B3B6F"/>
                 </a:solidFill>
                 <a:latin typeface="Amiri" pitchFamily="2" charset="-78"/>
+                <a:ea typeface="Amiri" pitchFamily="2" charset="-78"/>
                 <a:cs typeface="Amiri" pitchFamily="2" charset="-78"/>
               </a:rPr>
               <a:t>تَارِيخِيٌّ</a:t>
@@ -38547,6 +38798,7 @@
                   <a:srgbClr val="1B3B6F"/>
                 </a:solidFill>
                 <a:latin typeface="Amiri" pitchFamily="2" charset="-78"/>
+                <a:ea typeface="Amiri" pitchFamily="2" charset="-78"/>
                 <a:cs typeface="Amiri" pitchFamily="2" charset="-78"/>
               </a:rPr>
               <a:t>تَارِيخِيَّةٌ</a:t>
@@ -38650,6 +38902,7 @@
                   <a:srgbClr val="1B3B6F"/>
                 </a:solidFill>
                 <a:latin typeface="Amiri" pitchFamily="2" charset="-78"/>
+                <a:ea typeface="Amiri" pitchFamily="2" charset="-78"/>
                 <a:cs typeface="Amiri" pitchFamily="2" charset="-78"/>
               </a:rPr>
               <a:t>تَارِيخِيَّةٌ</a:t>
@@ -38753,6 +39006,7 @@
                   <a:srgbClr val="1B3B6F"/>
                 </a:solidFill>
                 <a:latin typeface="Amiri" pitchFamily="2" charset="-78"/>
+                <a:ea typeface="Amiri" pitchFamily="2" charset="-78"/>
                 <a:cs typeface="Amiri" pitchFamily="2" charset="-78"/>
               </a:rPr>
               <a:t>تَارِيخِيٌّ</a:t>
@@ -39018,6 +39272,7 @@
                   <a:srgbClr val="1B3B6F"/>
                 </a:solidFill>
                 <a:latin typeface="Amiri" pitchFamily="2" charset="-78"/>
+                <a:ea typeface="Amiri" pitchFamily="2" charset="-78"/>
                 <a:cs typeface="Amiri" pitchFamily="2" charset="-78"/>
               </a:rPr>
               <a:t>عُطْلَةٌ</a:t>
@@ -39175,6 +39430,7 @@
                   <a:srgbClr val="1B3B6F"/>
                 </a:solidFill>
                 <a:latin typeface="Amiri" pitchFamily="2" charset="-78"/>
+                <a:ea typeface="Amiri" pitchFamily="2" charset="-78"/>
                 <a:cs typeface="Amiri" pitchFamily="2" charset="-78"/>
               </a:rPr>
               <a:t>عُطَلٌ</a:t>
@@ -39278,6 +39534,7 @@
                   <a:srgbClr val="1B3B6F"/>
                 </a:solidFill>
                 <a:latin typeface="Amiri" pitchFamily="2" charset="-78"/>
+                <a:ea typeface="Amiri" pitchFamily="2" charset="-78"/>
                 <a:cs typeface="Amiri" pitchFamily="2" charset="-78"/>
               </a:rPr>
               <a:t>عُطْلَةٌ</a:t>
@@ -39543,6 +39800,7 @@
                   <a:srgbClr val="1B3B6F"/>
                 </a:solidFill>
                 <a:latin typeface="Amiri" pitchFamily="2" charset="-78"/>
+                <a:ea typeface="Amiri" pitchFamily="2" charset="-78"/>
                 <a:cs typeface="Amiri" pitchFamily="2" charset="-78"/>
               </a:rPr>
               <a:t>إِذَا …</a:t>
@@ -39862,6 +40120,7 @@
                   <a:srgbClr val="1B3B6F"/>
                 </a:solidFill>
                 <a:latin typeface="Amiri" pitchFamily="2" charset="-78"/>
+                <a:ea typeface="Amiri" pitchFamily="2" charset="-78"/>
                 <a:cs typeface="Amiri" pitchFamily="2" charset="-78"/>
               </a:rPr>
               <a:t>لَوْ كَانَ … لَسَافَرْتُ</a:t>
@@ -40049,6 +40308,7 @@
                   <a:srgbClr val="D4AF37"/>
                 </a:solidFill>
                 <a:latin typeface="Amiri" pitchFamily="2" charset="-78"/>
+                <a:ea typeface="Amiri" pitchFamily="2" charset="-78"/>
                 <a:cs typeface="Amiri" pitchFamily="2" charset="-78"/>
               </a:rPr>
               <a:t>م</a:t>
@@ -40369,6 +40629,7 @@
                   <a:srgbClr val="8A6D1E"/>
                 </a:solidFill>
                 <a:latin typeface="Amiri" pitchFamily="2" charset="-78"/>
+                <a:ea typeface="Amiri" pitchFamily="2" charset="-78"/>
                 <a:cs typeface="Amiri" pitchFamily="2" charset="-78"/>
               </a:rPr>
               <a:t>فِي الغُرَفِ</a:t>
@@ -41545,6 +41806,7 @@
                   <a:srgbClr val="1B3B6F"/>
                 </a:solidFill>
                 <a:latin typeface="Amiri" pitchFamily="2" charset="-78"/>
+                <a:ea typeface="Amiri" pitchFamily="2" charset="-78"/>
                 <a:cs typeface="Amiri" pitchFamily="2" charset="-78"/>
               </a:rPr>
               <a:t>دَوْرُكَ!</a:t>
@@ -41621,6 +41883,7 @@
                   <a:srgbClr val="1B3B6F"/>
                 </a:solidFill>
                 <a:latin typeface="Amiri" pitchFamily="2" charset="-78"/>
+                <a:ea typeface="Amiri" pitchFamily="2" charset="-78"/>
                 <a:cs typeface="Amiri" pitchFamily="2" charset="-78"/>
               </a:rPr>
               <a:t>أَحْسَنْتَ! / أَحْسَنْتِ!</a:t>
@@ -41697,6 +41960,7 @@
                   <a:srgbClr val="1B3B6F"/>
                 </a:solidFill>
                 <a:latin typeface="Amiri" pitchFamily="2" charset="-78"/>
+                <a:ea typeface="Amiri" pitchFamily="2" charset="-78"/>
                 <a:cs typeface="Amiri" pitchFamily="2" charset="-78"/>
               </a:rPr>
               <a:t>تَكَلَّمْ أَكْثَرَ، مِنْ فَضْلِكَ</a:t>
@@ -41773,6 +42037,7 @@
                   <a:srgbClr val="1B3B6F"/>
                 </a:solidFill>
                 <a:latin typeface="Amiri" pitchFamily="2" charset="-78"/>
+                <a:ea typeface="Amiri" pitchFamily="2" charset="-78"/>
                 <a:cs typeface="Amiri" pitchFamily="2" charset="-78"/>
               </a:rPr>
               <a:t>لِمَاذَا؟</a:t>
@@ -41944,6 +42209,7 @@
                   <a:srgbClr val="D4AF37"/>
                 </a:solidFill>
                 <a:latin typeface="Amiri" pitchFamily="2" charset="-78"/>
+                <a:ea typeface="Amiri" pitchFamily="2" charset="-78"/>
                 <a:cs typeface="Amiri" pitchFamily="2" charset="-78"/>
               </a:rPr>
               <a:t>م</a:t>
@@ -42264,6 +42530,7 @@
                   <a:srgbClr val="8A6D1E"/>
                 </a:solidFill>
                 <a:latin typeface="Amiri" pitchFamily="2" charset="-78"/>
+                <a:ea typeface="Amiri" pitchFamily="2" charset="-78"/>
                 <a:cs typeface="Amiri" pitchFamily="2" charset="-78"/>
               </a:rPr>
               <a:t>أَحْجِزُ غُرْفَةً</a:t>
@@ -42544,6 +42811,7 @@
                   <a:srgbClr val="1B3B6F"/>
                 </a:solidFill>
                 <a:latin typeface="Amiri" pitchFamily="2" charset="-78"/>
+                <a:ea typeface="Amiri" pitchFamily="2" charset="-78"/>
                 <a:cs typeface="Amiri" pitchFamily="2" charset="-78"/>
               </a:rPr>
               <a:t>أُرِيدُ أَنْ أَحْجِزَ غُرْفَةً …</a:t>
@@ -42620,6 +42888,7 @@
                   <a:srgbClr val="1B3B6F"/>
                 </a:solidFill>
                 <a:latin typeface="Amiri" pitchFamily="2" charset="-78"/>
+                <a:ea typeface="Amiri" pitchFamily="2" charset="-78"/>
                 <a:cs typeface="Amiri" pitchFamily="2" charset="-78"/>
               </a:rPr>
               <a:t>فُنْدُقُ البَحْرِ، تَفَضَّلْ.</a:t>
@@ -42788,6 +43057,7 @@
                   <a:srgbClr val="1B3B6F"/>
                 </a:solidFill>
                 <a:latin typeface="Amiri" pitchFamily="2" charset="-78"/>
+                <a:ea typeface="Amiri" pitchFamily="2" charset="-78"/>
                 <a:cs typeface="Amiri" pitchFamily="2" charset="-78"/>
               </a:rPr>
               <a:t>غُرْفَةٌ مُزْدَوِجَةٌ لِشَخْصَيْنِ …</a:t>
@@ -42864,6 +43134,7 @@
                   <a:srgbClr val="1B3B6F"/>
                 </a:solidFill>
                 <a:latin typeface="Amiri" pitchFamily="2" charset="-78"/>
+                <a:ea typeface="Amiri" pitchFamily="2" charset="-78"/>
                 <a:cs typeface="Amiri" pitchFamily="2" charset="-78"/>
               </a:rPr>
               <a:t>غُرْفَةٌ مُفْرَدَةٌ أَمْ مُزْدَوِجَةٌ؟</a:t>
@@ -43032,6 +43303,7 @@
                   <a:srgbClr val="1B3B6F"/>
                 </a:solidFill>
                 <a:latin typeface="Amiri" pitchFamily="2" charset="-78"/>
+                <a:ea typeface="Amiri" pitchFamily="2" charset="-78"/>
                 <a:cs typeface="Amiri" pitchFamily="2" charset="-78"/>
               </a:rPr>
               <a:t>… لَيَالٍ، مِنْ يَوْمِ …</a:t>
@@ -43108,6 +43380,7 @@
                   <a:srgbClr val="1B3B6F"/>
                 </a:solidFill>
                 <a:latin typeface="Amiri" pitchFamily="2" charset="-78"/>
+                <a:ea typeface="Amiri" pitchFamily="2" charset="-78"/>
                 <a:cs typeface="Amiri" pitchFamily="2" charset="-78"/>
               </a:rPr>
               <a:t>كَمْ لَيْلَةً؟</a:t>
@@ -43276,6 +43549,7 @@
                   <a:srgbClr val="1B3B6F"/>
                 </a:solidFill>
                 <a:latin typeface="Amiri" pitchFamily="2" charset="-78"/>
+                <a:ea typeface="Amiri" pitchFamily="2" charset="-78"/>
                 <a:cs typeface="Amiri" pitchFamily="2" charset="-78"/>
               </a:rPr>
               <a:t>نَعَمْ، لِأَنَّ …</a:t>
@@ -43352,6 +43626,7 @@
                   <a:srgbClr val="1B3B6F"/>
                 </a:solidFill>
                 <a:latin typeface="Amiri" pitchFamily="2" charset="-78"/>
+                <a:ea typeface="Amiri" pitchFamily="2" charset="-78"/>
                 <a:cs typeface="Amiri" pitchFamily="2" charset="-78"/>
               </a:rPr>
               <a:t>هَلْ تُرِيدُ غُرْفَةً تُطِلُّ عَلَى البَحْرِ؟</a:t>
@@ -43520,6 +43795,7 @@
                   <a:srgbClr val="1B3B6F"/>
                 </a:solidFill>
                 <a:latin typeface="Amiri" pitchFamily="2" charset="-78"/>
+                <a:ea typeface="Amiri" pitchFamily="2" charset="-78"/>
                 <a:cs typeface="Amiri" pitchFamily="2" charset="-78"/>
               </a:rPr>
               <a:t>سَأَصِلُ فِي السَّاعَةِ …</a:t>
@@ -43596,6 +43872,7 @@
                   <a:srgbClr val="1B3B6F"/>
                 </a:solidFill>
                 <a:latin typeface="Amiri" pitchFamily="2" charset="-78"/>
+                <a:ea typeface="Amiri" pitchFamily="2" charset="-78"/>
                 <a:cs typeface="Amiri" pitchFamily="2" charset="-78"/>
               </a:rPr>
               <a:t>مَتَى سَتَصِلُ إِلَى الفُنْدُقِ؟</a:t>
@@ -43870,6 +44147,7 @@
                   <a:srgbClr val="D4AF37"/>
                 </a:solidFill>
                 <a:latin typeface="Amiri" pitchFamily="2" charset="-78"/>
+                <a:ea typeface="Amiri" pitchFamily="2" charset="-78"/>
                 <a:cs typeface="Amiri" pitchFamily="2" charset="-78"/>
               </a:rPr>
               <a:t>م</a:t>
@@ -44190,6 +44468,7 @@
                   <a:srgbClr val="8A6D1E"/>
                 </a:solidFill>
                 <a:latin typeface="Amiri" pitchFamily="2" charset="-78"/>
+                <a:ea typeface="Amiri" pitchFamily="2" charset="-78"/>
                 <a:cs typeface="Amiri" pitchFamily="2" charset="-78"/>
               </a:rPr>
               <a:t>مُشْكِلَةٌ فِي الفُنْدُقِ</a:t>
@@ -44470,6 +44749,7 @@
                   <a:srgbClr val="1B3B6F"/>
                 </a:solidFill>
                 <a:latin typeface="Amiri" pitchFamily="2" charset="-78"/>
+                <a:ea typeface="Amiri" pitchFamily="2" charset="-78"/>
                 <a:cs typeface="Amiri" pitchFamily="2" charset="-78"/>
               </a:rPr>
               <a:t>نَعَمْ، المُكَيِّفُ فِي غُرْفَتِي لَا يَعْمَلُ …</a:t>
@@ -44546,6 +44826,7 @@
                   <a:srgbClr val="1B3B6F"/>
                 </a:solidFill>
                 <a:latin typeface="Amiri" pitchFamily="2" charset="-78"/>
+                <a:ea typeface="Amiri" pitchFamily="2" charset="-78"/>
                 <a:cs typeface="Amiri" pitchFamily="2" charset="-78"/>
               </a:rPr>
               <a:t>مَسَاءُ الخَيْرِ، هَلْ هُنَاكَ مُشْكِلَةٌ؟</a:t>
@@ -44714,6 +44995,7 @@
                   <a:srgbClr val="1B3B6F"/>
                 </a:solidFill>
                 <a:latin typeface="Amiri" pitchFamily="2" charset="-78"/>
+                <a:ea typeface="Amiri" pitchFamily="2" charset="-78"/>
                 <a:cs typeface="Amiri" pitchFamily="2" charset="-78"/>
               </a:rPr>
               <a:t>غُرْفَةٌ رَقْمُ … فِي الطَّابِقِ …</a:t>
@@ -44790,6 +45072,7 @@
                   <a:srgbClr val="1B3B6F"/>
                 </a:solidFill>
                 <a:latin typeface="Amiri" pitchFamily="2" charset="-78"/>
+                <a:ea typeface="Amiri" pitchFamily="2" charset="-78"/>
                 <a:cs typeface="Amiri" pitchFamily="2" charset="-78"/>
               </a:rPr>
               <a:t>مَا رَقْمُ غُرْفَتِكَ؟</a:t>
@@ -44958,6 +45241,7 @@
                   <a:srgbClr val="1B3B6F"/>
                 </a:solidFill>
                 <a:latin typeface="Amiri" pitchFamily="2" charset="-78"/>
+                <a:ea typeface="Amiri" pitchFamily="2" charset="-78"/>
                 <a:cs typeface="Amiri" pitchFamily="2" charset="-78"/>
               </a:rPr>
               <a:t>هَلْ يُمْكِنُ أَنْ …؟</a:t>
@@ -45034,6 +45318,7 @@
                   <a:srgbClr val="1B3B6F"/>
                 </a:solidFill>
                 <a:latin typeface="Amiri" pitchFamily="2" charset="-78"/>
+                <a:ea typeface="Amiri" pitchFamily="2" charset="-78"/>
                 <a:cs typeface="Amiri" pitchFamily="2" charset="-78"/>
               </a:rPr>
               <a:t>سَنُرْسِلُ مُوَظَّفًا غَدًا.</a:t>
@@ -45137,6 +45422,7 @@
                   <a:srgbClr val="1B3B6F"/>
                 </a:solidFill>
                 <a:latin typeface="Amiri" pitchFamily="2" charset="-78"/>
+                <a:ea typeface="Amiri" pitchFamily="2" charset="-78"/>
                 <a:cs typeface="Amiri" pitchFamily="2" charset="-78"/>
               </a:rPr>
               <a:t>شُكْرًا … مَتَى …؟</a:t>
@@ -45213,6 +45499,7 @@
                   <a:srgbClr val="1B3B6F"/>
                 </a:solidFill>
                 <a:latin typeface="Amiri" pitchFamily="2" charset="-78"/>
+                <a:ea typeface="Amiri" pitchFamily="2" charset="-78"/>
                 <a:cs typeface="Amiri" pitchFamily="2" charset="-78"/>
               </a:rPr>
               <a:t>طَبْعًا. عِنْدَنَا غُرْفَةٌ فِي الطَّابِقِ الخَامِسِ.</a:t>
@@ -45316,6 +45603,7 @@
                   <a:srgbClr val="1B3B6F"/>
                 </a:solidFill>
                 <a:latin typeface="Amiri" pitchFamily="2" charset="-78"/>
+                <a:ea typeface="Amiri" pitchFamily="2" charset="-78"/>
                 <a:cs typeface="Amiri" pitchFamily="2" charset="-78"/>
               </a:rPr>
               <a:t>زُرْتُ … وَكَانَ …</a:t>
@@ -45392,6 +45680,7 @@
                   <a:srgbClr val="1B3B6F"/>
                 </a:solidFill>
                 <a:latin typeface="Amiri" pitchFamily="2" charset="-78"/>
+                <a:ea typeface="Amiri" pitchFamily="2" charset="-78"/>
                 <a:cs typeface="Amiri" pitchFamily="2" charset="-78"/>
               </a:rPr>
               <a:t>كَيْفَ وَجَدْتَ مَدِينَتَنَا حَتَّى الآنَ؟</a:t>
@@ -45566,13 +45855,9 @@
     <a:fontScheme name="Office">
       <a:majorFont>
         <a:latin typeface="Calibri Light" panose="020F0302020204030204"/>
-        <a:ea typeface=""/>
-        <a:cs typeface=""/>
-        <a:font script="Jpan" typeface="游ゴシック Light"/>
-        <a:font script="Hang" typeface="맑은 고딕"/>
-        <a:font script="Hans" typeface="等线 Light"/>
-        <a:font script="Hant" typeface="新細明體"/>
-        <a:font script="Arab" typeface="Times New Roman"/>
+        <a:ea typeface="Amiri" pitchFamily="2" charset="-78"/>
+        <a:cs typeface="Amiri" pitchFamily="2" charset="-78"/>
+        <a:font script="Arab" typeface="Amiri"/>
         <a:font script="Hebr" typeface="Times New Roman"/>
         <a:font script="Thai" typeface="Angsana New"/>
         <a:font script="Ethi" typeface="Nyala"/>
@@ -45618,13 +45903,9 @@
       </a:majorFont>
       <a:minorFont>
         <a:latin typeface="Calibri" panose="020F0502020204030204"/>
-        <a:ea typeface=""/>
-        <a:cs typeface=""/>
-        <a:font script="Jpan" typeface="游ゴシック"/>
-        <a:font script="Hang" typeface="맑은 고딕"/>
-        <a:font script="Hans" typeface="等线"/>
-        <a:font script="Hant" typeface="新細明體"/>
-        <a:font script="Arab" typeface="Arial"/>
+        <a:ea typeface="Amiri" pitchFamily="2" charset="-78"/>
+        <a:cs typeface="Amiri" pitchFamily="2" charset="-78"/>
+        <a:font script="Arab" typeface="Amiri"/>
         <a:font script="Hebr" typeface="Arial"/>
         <a:font script="Thai" typeface="Cordia New"/>
         <a:font script="Ethi" typeface="Nyala"/>
